--- a/презентация.pptx
+++ b/презентация.pptx
@@ -6,7 +6,7 @@
     <p:sldMasterId id="2147483663" r:id="rId2"/>
   </p:sldMasterIdLst>
   <p:notesMasterIdLst>
-    <p:notesMasterId r:id="rId16"/>
+    <p:notesMasterId r:id="rId17"/>
   </p:notesMasterIdLst>
   <p:sldIdLst>
     <p:sldId id="310" r:id="rId3"/>
@@ -21,7 +21,8 @@
     <p:sldId id="313" r:id="rId12"/>
     <p:sldId id="302" r:id="rId13"/>
     <p:sldId id="315" r:id="rId14"/>
-    <p:sldId id="309" r:id="rId15"/>
+    <p:sldId id="316" r:id="rId15"/>
+    <p:sldId id="309" r:id="rId16"/>
   </p:sldIdLst>
   <p:sldSz cx="9144000" cy="5143500" type="screen16x9"/>
   <p:notesSz cx="6858000" cy="9144000"/>
@@ -153,11 +154,6 @@
   <p:extLst>
     <p:ext uri="{EFAFB233-063F-42B5-8137-9DF3F51BA10A}">
       <p15:sldGuideLst xmlns:p15="http://schemas.microsoft.com/office/powerpoint/2012/main">
-        <p15:guide id="1" orient="horz" pos="2981" userDrawn="1">
-          <p15:clr>
-            <a:srgbClr val="A4A3A4"/>
-          </p15:clr>
-        </p15:guide>
         <p15:guide id="2" pos="2880">
           <p15:clr>
             <a:srgbClr val="A4A3A4"/>
@@ -312,7 +308,7 @@
               <a:pPr>
                 <a:defRPr/>
               </a:pPr>
-              <a:t>04.09.2026</a:t>
+              <a:t>16.09.2026</a:t>
             </a:fld>
             <a:endParaRPr lang="ru-RU"/>
           </a:p>
@@ -758,7 +754,7 @@
             </a:pPr>
             <a:fld id="{DE56F33B-C104-4810-B1B9-487C5AA50F76}" type="datetime1">
               <a:rPr lang="ru-RU" smtClean="0"/>
-              <a:t>04.09.2026</a:t>
+              <a:t>16.09.2026</a:t>
             </a:fld>
             <a:endParaRPr lang="ru-RU"/>
           </a:p>
@@ -980,7 +976,7 @@
             </a:pPr>
             <a:fld id="{DE56F33B-C104-4810-B1B9-487C5AA50F76}" type="datetime1">
               <a:rPr lang="ru-RU" smtClean="0"/>
-              <a:t>04.09.2026</a:t>
+              <a:t>16.09.2026</a:t>
             </a:fld>
             <a:endParaRPr lang="ru-RU"/>
           </a:p>
@@ -2007,7 +2003,7 @@
         </p:nvSpPr>
         <p:spPr bwMode="auto">
           <a:xfrm>
-            <a:off x="251520" y="2355726"/>
+            <a:off x="251520" y="3075806"/>
             <a:ext cx="7757770" cy="504056"/>
           </a:xfrm>
           <a:prstGeom prst="rect">
@@ -2158,18 +2154,31 @@
             </a:lvl9pPr>
           </a:lstStyle>
           <a:p>
-            <a:pPr algn="l" eaLnBrk="1" hangingPunct="1"/>
+            <a:pPr algn="l"/>
+            <a:endParaRPr lang="ru-RU" dirty="0"/>
+          </a:p>
+          <a:p>
+            <a:pPr algn="l"/>
             <a:r>
-              <a:rPr lang="ru-RU" altLang="ru-RU" sz="4000" b="1" dirty="0">
+              <a:rPr lang="ru-RU" dirty="0"/>
+              <a:t> </a:t>
+            </a:r>
+            <a:r>
+              <a:rPr lang="ru-RU" b="1" dirty="0">
                 <a:solidFill>
                   <a:srgbClr val="2E56A8"/>
                 </a:solidFill>
-                <a:latin typeface="Arial" panose="020B0604020202020204" pitchFamily="34" charset="0"/>
-                <a:ea typeface="Roboto" panose="02000000000000000000" pitchFamily="2" charset="0"/>
-                <a:cs typeface="Arial" panose="020B0604020202020204" pitchFamily="34" charset="0"/>
               </a:rPr>
-              <a:t>Название и тема кейса</a:t>
+              <a:t>«ТЕХНОЛОГИИ БУДУЩЕГО:ПРОЕКТИРУЯ НОВУЮ ЭНЕРГЕТИКУ»</a:t>
             </a:r>
+            <a:endParaRPr lang="ru-RU" altLang="ru-RU" sz="4000" b="1" dirty="0">
+              <a:solidFill>
+                <a:srgbClr val="2E56A8"/>
+              </a:solidFill>
+              <a:latin typeface="Arial" panose="020B0604020202020204" pitchFamily="34" charset="0"/>
+              <a:ea typeface="Roboto" panose="02000000000000000000" pitchFamily="2" charset="0"/>
+              <a:cs typeface="Arial" panose="020B0604020202020204" pitchFamily="34" charset="0"/>
+            </a:endParaRPr>
           </a:p>
         </p:txBody>
       </p:sp>
@@ -2319,77 +2328,6 @@
                 <a:cs typeface="Arial" panose="020B0604020202020204" pitchFamily="34" charset="0"/>
               </a:rPr>
               <a:t>телефон</a:t>
-            </a:r>
-          </a:p>
-        </p:txBody>
-      </p:sp>
-      <p:sp>
-        <p:nvSpPr>
-          <p:cNvPr id="9" name="TextBox 8">
-            <a:extLst>
-              <a:ext uri="{FF2B5EF4-FFF2-40B4-BE49-F238E27FC236}">
-                <a16:creationId xmlns:a16="http://schemas.microsoft.com/office/drawing/2014/main" id="{3D41EA06-427C-4273-B425-B806C86E968C}"/>
-              </a:ext>
-            </a:extLst>
-          </p:cNvPr>
-          <p:cNvSpPr txBox="1"/>
-          <p:nvPr/>
-        </p:nvSpPr>
-        <p:spPr>
-          <a:xfrm>
-            <a:off x="5724128" y="267494"/>
-            <a:ext cx="3024336" cy="954107"/>
-          </a:xfrm>
-          <a:prstGeom prst="rect">
-            <a:avLst/>
-          </a:prstGeom>
-          <a:noFill/>
-        </p:spPr>
-        <p:txBody>
-          <a:bodyPr wrap="square" rtlCol="0">
-            <a:spAutoFit/>
-          </a:bodyPr>
-          <a:lstStyle/>
-          <a:p>
-            <a:pPr algn="r"/>
-            <a:r>
-              <a:rPr lang="ru-RU" sz="1400" dirty="0">
-                <a:solidFill>
-                  <a:srgbClr val="FF0000"/>
-                </a:solidFill>
-                <a:latin typeface="Arial" panose="020B0604020202020204" pitchFamily="34" charset="0"/>
-                <a:ea typeface="Roboto" panose="02000000000000000000" pitchFamily="2" charset="0"/>
-                <a:cs typeface="Arial" panose="020B0604020202020204" pitchFamily="34" charset="0"/>
-              </a:rPr>
-              <a:t>На данном слайде допускается </a:t>
-            </a:r>
-          </a:p>
-          <a:p>
-            <a:pPr algn="r"/>
-            <a:r>
-              <a:rPr lang="ru-RU" sz="1400" dirty="0">
-                <a:solidFill>
-                  <a:srgbClr val="FF0000"/>
-                </a:solidFill>
-                <a:latin typeface="Arial" panose="020B0604020202020204" pitchFamily="34" charset="0"/>
-                <a:ea typeface="Roboto" panose="02000000000000000000" pitchFamily="2" charset="0"/>
-                <a:cs typeface="Arial" panose="020B0604020202020204" pitchFamily="34" charset="0"/>
-              </a:rPr>
-              <a:t>размещение заднего фона и </a:t>
-            </a:r>
-          </a:p>
-          <a:p>
-            <a:pPr algn="r"/>
-            <a:r>
-              <a:rPr lang="ru-RU" sz="1400" dirty="0">
-                <a:solidFill>
-                  <a:srgbClr val="FF0000"/>
-                </a:solidFill>
-                <a:latin typeface="Arial" panose="020B0604020202020204" pitchFamily="34" charset="0"/>
-                <a:ea typeface="Roboto" panose="02000000000000000000" pitchFamily="2" charset="0"/>
-                <a:cs typeface="Arial" panose="020B0604020202020204" pitchFamily="34" charset="0"/>
-              </a:rPr>
-              <a:t>флага страны, которую представляет команда</a:t>
             </a:r>
           </a:p>
         </p:txBody>
@@ -3319,32 +3257,18 @@
               </a:rPr>
               <a:t>Оценка предполагаемого эффекта </a:t>
             </a:r>
-            <a:r>
-              <a:rPr lang="ru-RU" altLang="ru-RU" sz="1800" dirty="0" smtClean="0">
-                <a:latin typeface="Arial" panose="020B0604020202020204" pitchFamily="34" charset="0"/>
-                <a:cs typeface="Arial" panose="020B0604020202020204" pitchFamily="34" charset="0"/>
-              </a:rPr>
-              <a:t/>
-            </a:r>
             <a:br>
-              <a:rPr lang="ru-RU" altLang="ru-RU" sz="1800" dirty="0" smtClean="0">
+              <a:rPr lang="ru-RU" altLang="ru-RU" sz="1800" dirty="0">
                 <a:latin typeface="Arial" panose="020B0604020202020204" pitchFamily="34" charset="0"/>
                 <a:cs typeface="Arial" panose="020B0604020202020204" pitchFamily="34" charset="0"/>
               </a:rPr>
             </a:br>
             <a:r>
-              <a:rPr lang="ru-RU" altLang="ru-RU" sz="1800" dirty="0" smtClean="0">
-                <a:latin typeface="Arial" panose="020B0604020202020204" pitchFamily="34" charset="0"/>
-                <a:cs typeface="Arial" panose="020B0604020202020204" pitchFamily="34" charset="0"/>
-              </a:rPr>
-              <a:t>с </a:t>
-            </a:r>
-            <a:r>
               <a:rPr lang="ru-RU" altLang="ru-RU" sz="1800" dirty="0">
                 <a:latin typeface="Arial" panose="020B0604020202020204" pitchFamily="34" charset="0"/>
                 <a:cs typeface="Arial" panose="020B0604020202020204" pitchFamily="34" charset="0"/>
               </a:rPr>
-              <a:t>учетом применения предложенного решения.</a:t>
+              <a:t>с учетом применения предложенного решения.</a:t>
             </a:r>
           </a:p>
         </p:txBody>
@@ -4185,32 +4109,18 @@
               </a:rPr>
               <a:t>Оценка предполагаемого эффекта </a:t>
             </a:r>
-            <a:r>
-              <a:rPr lang="ru-RU" altLang="ru-RU" sz="1800" dirty="0" smtClean="0">
-                <a:latin typeface="Arial" panose="020B0604020202020204" pitchFamily="34" charset="0"/>
-                <a:cs typeface="Arial" panose="020B0604020202020204" pitchFamily="34" charset="0"/>
-              </a:rPr>
-              <a:t/>
-            </a:r>
             <a:br>
-              <a:rPr lang="ru-RU" altLang="ru-RU" sz="1800" dirty="0" smtClean="0">
+              <a:rPr lang="ru-RU" altLang="ru-RU" sz="1800" dirty="0">
                 <a:latin typeface="Arial" panose="020B0604020202020204" pitchFamily="34" charset="0"/>
                 <a:cs typeface="Arial" panose="020B0604020202020204" pitchFamily="34" charset="0"/>
               </a:rPr>
             </a:br>
             <a:r>
-              <a:rPr lang="ru-RU" altLang="ru-RU" sz="1800" dirty="0" smtClean="0">
-                <a:latin typeface="Arial" panose="020B0604020202020204" pitchFamily="34" charset="0"/>
-                <a:cs typeface="Arial" panose="020B0604020202020204" pitchFamily="34" charset="0"/>
-              </a:rPr>
-              <a:t>с </a:t>
-            </a:r>
-            <a:r>
               <a:rPr lang="ru-RU" altLang="ru-RU" sz="1800" dirty="0">
                 <a:latin typeface="Arial" panose="020B0604020202020204" pitchFamily="34" charset="0"/>
                 <a:cs typeface="Arial" panose="020B0604020202020204" pitchFamily="34" charset="0"/>
               </a:rPr>
-              <a:t>учетом применения предложенного решения.</a:t>
+              <a:t>с учетом применения предложенного решения.</a:t>
             </a:r>
           </a:p>
         </p:txBody>
@@ -5051,32 +4961,18 @@
               </a:rPr>
               <a:t>Оценка предполагаемого эффекта </a:t>
             </a:r>
-            <a:r>
-              <a:rPr lang="ru-RU" altLang="ru-RU" sz="1800" dirty="0" smtClean="0">
-                <a:latin typeface="Arial" panose="020B0604020202020204" pitchFamily="34" charset="0"/>
-                <a:cs typeface="Arial" panose="020B0604020202020204" pitchFamily="34" charset="0"/>
-              </a:rPr>
-              <a:t/>
-            </a:r>
             <a:br>
-              <a:rPr lang="ru-RU" altLang="ru-RU" sz="1800" dirty="0" smtClean="0">
+              <a:rPr lang="ru-RU" altLang="ru-RU" sz="1800" dirty="0">
                 <a:latin typeface="Arial" panose="020B0604020202020204" pitchFamily="34" charset="0"/>
                 <a:cs typeface="Arial" panose="020B0604020202020204" pitchFamily="34" charset="0"/>
               </a:rPr>
             </a:br>
             <a:r>
-              <a:rPr lang="ru-RU" altLang="ru-RU" sz="1800" dirty="0" smtClean="0">
-                <a:latin typeface="Arial" panose="020B0604020202020204" pitchFamily="34" charset="0"/>
-                <a:cs typeface="Arial" panose="020B0604020202020204" pitchFamily="34" charset="0"/>
-              </a:rPr>
-              <a:t>с </a:t>
-            </a:r>
-            <a:r>
               <a:rPr lang="ru-RU" altLang="ru-RU" sz="1800" dirty="0">
                 <a:latin typeface="Arial" panose="020B0604020202020204" pitchFamily="34" charset="0"/>
                 <a:cs typeface="Arial" panose="020B0604020202020204" pitchFamily="34" charset="0"/>
               </a:rPr>
-              <a:t>учетом применения предложенного решения.</a:t>
+              <a:t>с учетом применения предложенного решения.</a:t>
             </a:r>
           </a:p>
         </p:txBody>
@@ -5095,6 +4991,876 @@
 </file>
 
 <file path=ppt/slides/slide13.xml><?xml version="1.0" encoding="utf-8"?>
+<p:sld xmlns:a="http://schemas.openxmlformats.org/drawingml/2006/main" xmlns:r="http://schemas.openxmlformats.org/officeDocument/2006/relationships" xmlns:p="http://schemas.openxmlformats.org/presentationml/2006/main">
+  <p:cSld>
+    <p:spTree>
+      <p:nvGrpSpPr>
+        <p:cNvPr id="1" name="">
+          <a:extLst>
+            <a:ext uri="{FF2B5EF4-FFF2-40B4-BE49-F238E27FC236}">
+              <a16:creationId xmlns:a16="http://schemas.microsoft.com/office/drawing/2014/main" id="{73654680-D6B2-34B9-655C-A795CE4BF495}"/>
+            </a:ext>
+          </a:extLst>
+        </p:cNvPr>
+        <p:cNvGrpSpPr/>
+        <p:nvPr/>
+      </p:nvGrpSpPr>
+      <p:grpSpPr>
+        <a:xfrm>
+          <a:off x="0" y="0"/>
+          <a:ext cx="0" cy="0"/>
+          <a:chOff x="0" y="0"/>
+          <a:chExt cx="0" cy="0"/>
+        </a:xfrm>
+      </p:grpSpPr>
+      <p:sp>
+        <p:nvSpPr>
+          <p:cNvPr id="2" name="Номер слайда 1">
+            <a:extLst>
+              <a:ext uri="{FF2B5EF4-FFF2-40B4-BE49-F238E27FC236}">
+                <a16:creationId xmlns:a16="http://schemas.microsoft.com/office/drawing/2014/main" id="{BABDE781-3554-F9FB-283D-034A6CF67AEC}"/>
+              </a:ext>
+            </a:extLst>
+          </p:cNvPr>
+          <p:cNvSpPr>
+            <a:spLocks noGrp="1"/>
+          </p:cNvSpPr>
+          <p:nvPr>
+            <p:ph type="sldNum" sz="quarter" idx="12"/>
+          </p:nvPr>
+        </p:nvSpPr>
+        <p:spPr>
+          <a:xfrm>
+            <a:off x="8625296" y="4779963"/>
+            <a:ext cx="333400" cy="273844"/>
+          </a:xfrm>
+        </p:spPr>
+        <p:txBody>
+          <a:bodyPr/>
+          <a:lstStyle/>
+          <a:p>
+            <a:fld id="{1C0A57E3-EA23-4E01-B1DF-72CA8D4A16E5}" type="slidenum">
+              <a:rPr lang="ru-RU" altLang="ru-RU" sz="1050" smtClean="0">
+                <a:solidFill>
+                  <a:schemeClr val="tx1"/>
+                </a:solidFill>
+                <a:latin typeface="Arial Narrow" panose="020B0606020202030204" pitchFamily="34" charset="0"/>
+              </a:rPr>
+              <a:pPr/>
+              <a:t>13</a:t>
+            </a:fld>
+            <a:endParaRPr lang="ru-RU" altLang="ru-RU" sz="1000" dirty="0">
+              <a:solidFill>
+                <a:schemeClr val="tx1"/>
+              </a:solidFill>
+              <a:latin typeface="Arial Narrow" panose="020B0606020202030204" pitchFamily="34" charset="0"/>
+            </a:endParaRPr>
+          </a:p>
+        </p:txBody>
+      </p:sp>
+      <p:sp>
+        <p:nvSpPr>
+          <p:cNvPr id="12" name="Объект 2">
+            <a:extLst>
+              <a:ext uri="{FF2B5EF4-FFF2-40B4-BE49-F238E27FC236}">
+                <a16:creationId xmlns:a16="http://schemas.microsoft.com/office/drawing/2014/main" id="{56C77C07-DB56-81AD-81C3-E2210EBACFB8}"/>
+              </a:ext>
+            </a:extLst>
+          </p:cNvPr>
+          <p:cNvSpPr txBox="1">
+            <a:spLocks/>
+          </p:cNvSpPr>
+          <p:nvPr/>
+        </p:nvSpPr>
+        <p:spPr bwMode="auto">
+          <a:xfrm>
+            <a:off x="323528" y="1686777"/>
+            <a:ext cx="3435016" cy="1861192"/>
+          </a:xfrm>
+          <a:prstGeom prst="rect">
+            <a:avLst/>
+          </a:prstGeom>
+          <a:noFill/>
+          <a:ln w="9525">
+            <a:noFill/>
+            <a:miter lim="800000"/>
+            <a:headEnd/>
+            <a:tailEnd/>
+          </a:ln>
+        </p:spPr>
+        <p:txBody>
+          <a:bodyPr vert="horz" wrap="square" lIns="91440" tIns="45720" rIns="91440" bIns="45720" numCol="1" anchor="t" anchorCtr="0" compatLnSpc="1">
+            <a:prstTxWarp prst="textNoShape">
+              <a:avLst/>
+            </a:prstTxWarp>
+          </a:bodyPr>
+          <a:lstStyle>
+            <a:lvl1pPr marL="342900" indent="-342900" algn="l" rtl="0" eaLnBrk="0" fontAlgn="base" hangingPunct="0">
+              <a:spcBef>
+                <a:spcPct val="20000"/>
+              </a:spcBef>
+              <a:spcAft>
+                <a:spcPct val="0"/>
+              </a:spcAft>
+              <a:buFont typeface="Arial" charset="0"/>
+              <a:buChar char="•"/>
+              <a:defRPr sz="3200" kern="1200">
+                <a:solidFill>
+                  <a:schemeClr val="tx1"/>
+                </a:solidFill>
+                <a:latin typeface="+mn-lt"/>
+                <a:ea typeface="+mn-ea"/>
+                <a:cs typeface="+mn-cs"/>
+              </a:defRPr>
+            </a:lvl1pPr>
+            <a:lvl2pPr marL="742950" indent="-285750" algn="l" rtl="0" eaLnBrk="0" fontAlgn="base" hangingPunct="0">
+              <a:spcBef>
+                <a:spcPct val="20000"/>
+              </a:spcBef>
+              <a:spcAft>
+                <a:spcPct val="0"/>
+              </a:spcAft>
+              <a:buFont typeface="Arial" charset="0"/>
+              <a:buChar char="–"/>
+              <a:defRPr sz="2800" kern="1200">
+                <a:solidFill>
+                  <a:schemeClr val="tx1"/>
+                </a:solidFill>
+                <a:latin typeface="+mn-lt"/>
+                <a:ea typeface="+mn-ea"/>
+                <a:cs typeface="+mn-cs"/>
+              </a:defRPr>
+            </a:lvl2pPr>
+            <a:lvl3pPr marL="1143000" indent="-228600" algn="l" rtl="0" eaLnBrk="0" fontAlgn="base" hangingPunct="0">
+              <a:spcBef>
+                <a:spcPct val="20000"/>
+              </a:spcBef>
+              <a:spcAft>
+                <a:spcPct val="0"/>
+              </a:spcAft>
+              <a:buFont typeface="Arial" charset="0"/>
+              <a:buChar char="•"/>
+              <a:defRPr sz="2400" kern="1200">
+                <a:solidFill>
+                  <a:schemeClr val="tx1"/>
+                </a:solidFill>
+                <a:latin typeface="+mn-lt"/>
+                <a:ea typeface="+mn-ea"/>
+                <a:cs typeface="+mn-cs"/>
+              </a:defRPr>
+            </a:lvl3pPr>
+            <a:lvl4pPr marL="1600200" indent="-228600" algn="l" rtl="0" eaLnBrk="0" fontAlgn="base" hangingPunct="0">
+              <a:spcBef>
+                <a:spcPct val="20000"/>
+              </a:spcBef>
+              <a:spcAft>
+                <a:spcPct val="0"/>
+              </a:spcAft>
+              <a:buFont typeface="Arial" charset="0"/>
+              <a:buChar char="–"/>
+              <a:defRPr sz="2000" kern="1200">
+                <a:solidFill>
+                  <a:schemeClr val="tx1"/>
+                </a:solidFill>
+                <a:latin typeface="+mn-lt"/>
+                <a:ea typeface="+mn-ea"/>
+                <a:cs typeface="+mn-cs"/>
+              </a:defRPr>
+            </a:lvl4pPr>
+            <a:lvl5pPr marL="2057400" indent="-228600" algn="l" rtl="0" eaLnBrk="0" fontAlgn="base" hangingPunct="0">
+              <a:spcBef>
+                <a:spcPct val="20000"/>
+              </a:spcBef>
+              <a:spcAft>
+                <a:spcPct val="0"/>
+              </a:spcAft>
+              <a:buFont typeface="Arial" charset="0"/>
+              <a:buChar char="»"/>
+              <a:defRPr sz="2000" kern="1200">
+                <a:solidFill>
+                  <a:schemeClr val="tx1"/>
+                </a:solidFill>
+                <a:latin typeface="+mn-lt"/>
+                <a:ea typeface="+mn-ea"/>
+                <a:cs typeface="+mn-cs"/>
+              </a:defRPr>
+            </a:lvl5pPr>
+            <a:lvl6pPr marL="2514600" indent="-228600" algn="l" defTabSz="914400" rtl="0" eaLnBrk="1" latinLnBrk="0" hangingPunct="1">
+              <a:spcBef>
+                <a:spcPct val="20000"/>
+              </a:spcBef>
+              <a:buFont typeface="Arial" pitchFamily="34" charset="0"/>
+              <a:buChar char="•"/>
+              <a:defRPr sz="2000" kern="1200">
+                <a:solidFill>
+                  <a:schemeClr val="tx1"/>
+                </a:solidFill>
+                <a:latin typeface="+mn-lt"/>
+                <a:ea typeface="+mn-ea"/>
+                <a:cs typeface="+mn-cs"/>
+              </a:defRPr>
+            </a:lvl6pPr>
+            <a:lvl7pPr marL="2971800" indent="-228600" algn="l" defTabSz="914400" rtl="0" eaLnBrk="1" latinLnBrk="0" hangingPunct="1">
+              <a:spcBef>
+                <a:spcPct val="20000"/>
+              </a:spcBef>
+              <a:buFont typeface="Arial" pitchFamily="34" charset="0"/>
+              <a:buChar char="•"/>
+              <a:defRPr sz="2000" kern="1200">
+                <a:solidFill>
+                  <a:schemeClr val="tx1"/>
+                </a:solidFill>
+                <a:latin typeface="+mn-lt"/>
+                <a:ea typeface="+mn-ea"/>
+                <a:cs typeface="+mn-cs"/>
+              </a:defRPr>
+            </a:lvl7pPr>
+            <a:lvl8pPr marL="3429000" indent="-228600" algn="l" defTabSz="914400" rtl="0" eaLnBrk="1" latinLnBrk="0" hangingPunct="1">
+              <a:spcBef>
+                <a:spcPct val="20000"/>
+              </a:spcBef>
+              <a:buFont typeface="Arial" pitchFamily="34" charset="0"/>
+              <a:buChar char="•"/>
+              <a:defRPr sz="2000" kern="1200">
+                <a:solidFill>
+                  <a:schemeClr val="tx1"/>
+                </a:solidFill>
+                <a:latin typeface="+mn-lt"/>
+                <a:ea typeface="+mn-ea"/>
+                <a:cs typeface="+mn-cs"/>
+              </a:defRPr>
+            </a:lvl8pPr>
+            <a:lvl9pPr marL="3886200" indent="-228600" algn="l" defTabSz="914400" rtl="0" eaLnBrk="1" latinLnBrk="0" hangingPunct="1">
+              <a:spcBef>
+                <a:spcPct val="20000"/>
+              </a:spcBef>
+              <a:buFont typeface="Arial" pitchFamily="34" charset="0"/>
+              <a:buChar char="•"/>
+              <a:defRPr sz="2000" kern="1200">
+                <a:solidFill>
+                  <a:schemeClr val="tx1"/>
+                </a:solidFill>
+                <a:latin typeface="+mn-lt"/>
+                <a:ea typeface="+mn-ea"/>
+                <a:cs typeface="+mn-cs"/>
+              </a:defRPr>
+            </a:lvl9pPr>
+          </a:lstStyle>
+          <a:p>
+            <a:pPr marL="0" indent="0" eaLnBrk="1" hangingPunct="1">
+              <a:spcBef>
+                <a:spcPts val="1200"/>
+              </a:spcBef>
+              <a:spcAft>
+                <a:spcPts val="1200"/>
+              </a:spcAft>
+              <a:buClr>
+                <a:srgbClr val="0166B3"/>
+              </a:buClr>
+              <a:buFont typeface="Arial" charset="0"/>
+              <a:buNone/>
+            </a:pPr>
+            <a:r>
+              <a:rPr lang="ru-RU" altLang="ru-RU" sz="2000" spc="20" dirty="0">
+                <a:solidFill>
+                  <a:srgbClr val="FF0000"/>
+                </a:solidFill>
+                <a:latin typeface="Arial" panose="020B0604020202020204" pitchFamily="34" charset="0"/>
+                <a:ea typeface="Roboto" panose="02000000000000000000" pitchFamily="2" charset="0"/>
+                <a:cs typeface="Arial" panose="020B0604020202020204" pitchFamily="34" charset="0"/>
+              </a:rPr>
+              <a:t>На данном слайде </a:t>
+            </a:r>
+            <a:r>
+              <a:rPr lang="ru-RU" altLang="ru-RU" sz="2000" u="sng" spc="20" dirty="0">
+                <a:solidFill>
+                  <a:srgbClr val="FF0000"/>
+                </a:solidFill>
+                <a:latin typeface="Arial" panose="020B0604020202020204" pitchFamily="34" charset="0"/>
+                <a:ea typeface="Roboto" panose="02000000000000000000" pitchFamily="2" charset="0"/>
+                <a:cs typeface="Arial" panose="020B0604020202020204" pitchFamily="34" charset="0"/>
+              </a:rPr>
+              <a:t>рекомендуется </a:t>
+            </a:r>
+            <a:r>
+              <a:rPr lang="ru-RU" altLang="ru-RU" sz="2000" spc="20" dirty="0">
+                <a:solidFill>
+                  <a:srgbClr val="FF0000"/>
+                </a:solidFill>
+                <a:latin typeface="Arial" panose="020B0604020202020204" pitchFamily="34" charset="0"/>
+                <a:ea typeface="Roboto" panose="02000000000000000000" pitchFamily="2" charset="0"/>
+                <a:cs typeface="Arial" panose="020B0604020202020204" pitchFamily="34" charset="0"/>
+              </a:rPr>
+              <a:t>презентовать:</a:t>
+            </a:r>
+          </a:p>
+        </p:txBody>
+      </p:sp>
+      <p:sp>
+        <p:nvSpPr>
+          <p:cNvPr id="14" name="Заголовок 1">
+            <a:extLst>
+              <a:ext uri="{FF2B5EF4-FFF2-40B4-BE49-F238E27FC236}">
+                <a16:creationId xmlns:a16="http://schemas.microsoft.com/office/drawing/2014/main" id="{AED59EE1-401E-22FE-FF8D-0A886FA21968}"/>
+              </a:ext>
+            </a:extLst>
+          </p:cNvPr>
+          <p:cNvSpPr txBox="1">
+            <a:spLocks/>
+          </p:cNvSpPr>
+          <p:nvPr/>
+        </p:nvSpPr>
+        <p:spPr bwMode="auto">
+          <a:xfrm>
+            <a:off x="319496" y="213364"/>
+            <a:ext cx="5692664" cy="711703"/>
+          </a:xfrm>
+          <a:prstGeom prst="rect">
+            <a:avLst/>
+          </a:prstGeom>
+          <a:noFill/>
+          <a:ln w="9525">
+            <a:noFill/>
+            <a:miter lim="800000"/>
+            <a:headEnd/>
+            <a:tailEnd/>
+          </a:ln>
+        </p:spPr>
+        <p:txBody>
+          <a:bodyPr vert="horz" wrap="square" lIns="91440" tIns="45720" rIns="91440" bIns="45720" numCol="1" anchor="t" anchorCtr="0" compatLnSpc="1">
+            <a:prstTxWarp prst="textNoShape">
+              <a:avLst/>
+            </a:prstTxWarp>
+          </a:bodyPr>
+          <a:lstStyle>
+            <a:lvl1pPr algn="ctr" rtl="0" eaLnBrk="0" fontAlgn="base" hangingPunct="0">
+              <a:spcBef>
+                <a:spcPct val="0"/>
+              </a:spcBef>
+              <a:spcAft>
+                <a:spcPct val="0"/>
+              </a:spcAft>
+              <a:defRPr sz="4400" kern="1200">
+                <a:solidFill>
+                  <a:schemeClr val="tx1"/>
+                </a:solidFill>
+                <a:latin typeface="+mj-lt"/>
+                <a:ea typeface="+mj-ea"/>
+                <a:cs typeface="+mj-cs"/>
+              </a:defRPr>
+            </a:lvl1pPr>
+            <a:lvl2pPr algn="ctr" rtl="0" eaLnBrk="0" fontAlgn="base" hangingPunct="0">
+              <a:spcBef>
+                <a:spcPct val="0"/>
+              </a:spcBef>
+              <a:spcAft>
+                <a:spcPct val="0"/>
+              </a:spcAft>
+              <a:defRPr sz="4400">
+                <a:solidFill>
+                  <a:schemeClr val="tx1"/>
+                </a:solidFill>
+                <a:latin typeface="Calibri" pitchFamily="34" charset="0"/>
+              </a:defRPr>
+            </a:lvl2pPr>
+            <a:lvl3pPr algn="ctr" rtl="0" eaLnBrk="0" fontAlgn="base" hangingPunct="0">
+              <a:spcBef>
+                <a:spcPct val="0"/>
+              </a:spcBef>
+              <a:spcAft>
+                <a:spcPct val="0"/>
+              </a:spcAft>
+              <a:defRPr sz="4400">
+                <a:solidFill>
+                  <a:schemeClr val="tx1"/>
+                </a:solidFill>
+                <a:latin typeface="Calibri" pitchFamily="34" charset="0"/>
+              </a:defRPr>
+            </a:lvl3pPr>
+            <a:lvl4pPr algn="ctr" rtl="0" eaLnBrk="0" fontAlgn="base" hangingPunct="0">
+              <a:spcBef>
+                <a:spcPct val="0"/>
+              </a:spcBef>
+              <a:spcAft>
+                <a:spcPct val="0"/>
+              </a:spcAft>
+              <a:defRPr sz="4400">
+                <a:solidFill>
+                  <a:schemeClr val="tx1"/>
+                </a:solidFill>
+                <a:latin typeface="Calibri" pitchFamily="34" charset="0"/>
+              </a:defRPr>
+            </a:lvl4pPr>
+            <a:lvl5pPr algn="ctr" rtl="0" eaLnBrk="0" fontAlgn="base" hangingPunct="0">
+              <a:spcBef>
+                <a:spcPct val="0"/>
+              </a:spcBef>
+              <a:spcAft>
+                <a:spcPct val="0"/>
+              </a:spcAft>
+              <a:defRPr sz="4400">
+                <a:solidFill>
+                  <a:schemeClr val="tx1"/>
+                </a:solidFill>
+                <a:latin typeface="Calibri" pitchFamily="34" charset="0"/>
+              </a:defRPr>
+            </a:lvl5pPr>
+            <a:lvl6pPr marL="457200" algn="ctr" rtl="0" eaLnBrk="1" fontAlgn="base" hangingPunct="1">
+              <a:spcBef>
+                <a:spcPct val="0"/>
+              </a:spcBef>
+              <a:spcAft>
+                <a:spcPct val="0"/>
+              </a:spcAft>
+              <a:defRPr sz="4400">
+                <a:solidFill>
+                  <a:schemeClr val="tx1"/>
+                </a:solidFill>
+                <a:latin typeface="Calibri" pitchFamily="34" charset="0"/>
+              </a:defRPr>
+            </a:lvl6pPr>
+            <a:lvl7pPr marL="914400" algn="ctr" rtl="0" eaLnBrk="1" fontAlgn="base" hangingPunct="1">
+              <a:spcBef>
+                <a:spcPct val="0"/>
+              </a:spcBef>
+              <a:spcAft>
+                <a:spcPct val="0"/>
+              </a:spcAft>
+              <a:defRPr sz="4400">
+                <a:solidFill>
+                  <a:schemeClr val="tx1"/>
+                </a:solidFill>
+                <a:latin typeface="Calibri" pitchFamily="34" charset="0"/>
+              </a:defRPr>
+            </a:lvl7pPr>
+            <a:lvl8pPr marL="1371600" algn="ctr" rtl="0" eaLnBrk="1" fontAlgn="base" hangingPunct="1">
+              <a:spcBef>
+                <a:spcPct val="0"/>
+              </a:spcBef>
+              <a:spcAft>
+                <a:spcPct val="0"/>
+              </a:spcAft>
+              <a:defRPr sz="4400">
+                <a:solidFill>
+                  <a:schemeClr val="tx1"/>
+                </a:solidFill>
+                <a:latin typeface="Calibri" pitchFamily="34" charset="0"/>
+              </a:defRPr>
+            </a:lvl8pPr>
+            <a:lvl9pPr marL="1828800" algn="ctr" rtl="0" eaLnBrk="1" fontAlgn="base" hangingPunct="1">
+              <a:spcBef>
+                <a:spcPct val="0"/>
+              </a:spcBef>
+              <a:spcAft>
+                <a:spcPct val="0"/>
+              </a:spcAft>
+              <a:defRPr sz="4400">
+                <a:solidFill>
+                  <a:schemeClr val="tx1"/>
+                </a:solidFill>
+                <a:latin typeface="Calibri" pitchFamily="34" charset="0"/>
+              </a:defRPr>
+            </a:lvl9pPr>
+          </a:lstStyle>
+          <a:p>
+            <a:pPr algn="l" eaLnBrk="1" hangingPunct="1"/>
+            <a:r>
+              <a:rPr lang="ru-RU" altLang="ru-RU" sz="2400" b="1" dirty="0">
+                <a:solidFill>
+                  <a:srgbClr val="2E56A8"/>
+                </a:solidFill>
+                <a:latin typeface="Arial" panose="020B0604020202020204" pitchFamily="34" charset="0"/>
+                <a:ea typeface="Roboto" panose="02000000000000000000" pitchFamily="2" charset="0"/>
+                <a:cs typeface="Arial" panose="020B0604020202020204" pitchFamily="34" charset="0"/>
+              </a:rPr>
+              <a:t>Источники</a:t>
+            </a:r>
+          </a:p>
+        </p:txBody>
+      </p:sp>
+      <p:sp>
+        <p:nvSpPr>
+          <p:cNvPr id="6" name="Rectangle 3">
+            <a:extLst>
+              <a:ext uri="{FF2B5EF4-FFF2-40B4-BE49-F238E27FC236}">
+                <a16:creationId xmlns:a16="http://schemas.microsoft.com/office/drawing/2014/main" id="{212F8D75-1138-76F8-A3D7-7025A1AE5BD1}"/>
+              </a:ext>
+            </a:extLst>
+          </p:cNvPr>
+          <p:cNvSpPr>
+            <a:spLocks noChangeArrowheads="1"/>
+          </p:cNvSpPr>
+          <p:nvPr/>
+        </p:nvSpPr>
+        <p:spPr bwMode="auto">
+          <a:xfrm>
+            <a:off x="4211960" y="1707654"/>
+            <a:ext cx="4793928" cy="921876"/>
+          </a:xfrm>
+          <a:prstGeom prst="rect">
+            <a:avLst/>
+          </a:prstGeom>
+          <a:noFill/>
+          <a:ln>
+            <a:noFill/>
+          </a:ln>
+          <a:effectLst/>
+          <a:extLst>
+            <a:ext uri="{909E8E84-426E-40DD-AFC4-6F175D3DCCD1}">
+              <a14:hiddenFill xmlns:a14="http://schemas.microsoft.com/office/drawing/2010/main">
+                <a:solidFill>
+                  <a:srgbClr val="FFFFFF"/>
+                </a:solidFill>
+              </a14:hiddenFill>
+            </a:ext>
+            <a:ext uri="{91240B29-F687-4F45-9708-019B960494DF}">
+              <a14:hiddenLine xmlns:a14="http://schemas.microsoft.com/office/drawing/2010/main" w="9525">
+                <a:solidFill>
+                  <a:srgbClr val="3465A4"/>
+                </a:solidFill>
+                <a:round/>
+                <a:headEnd/>
+                <a:tailEnd/>
+              </a14:hiddenLine>
+            </a:ext>
+            <a:ext uri="{AF507438-7753-43E0-B8FC-AC1667EBCBE1}">
+              <a14:hiddenEffects xmlns:a14="http://schemas.microsoft.com/office/drawing/2010/main">
+                <a:effectLst>
+                  <a:outerShdw dist="35921" dir="2700000" algn="ctr" rotWithShape="0">
+                    <a:srgbClr val="808080"/>
+                  </a:outerShdw>
+                </a:effectLst>
+              </a14:hiddenEffects>
+            </a:ext>
+          </a:extLst>
+        </p:spPr>
+        <p:txBody>
+          <a:bodyPr wrap="square" lIns="90000" tIns="45000" rIns="90000" bIns="45000">
+            <a:spAutoFit/>
+          </a:bodyPr>
+          <a:lstStyle>
+            <a:lvl1pPr marL="285750" indent="-285750">
+              <a:lnSpc>
+                <a:spcPct val="83000"/>
+              </a:lnSpc>
+              <a:spcBef>
+                <a:spcPts val="1425"/>
+              </a:spcBef>
+              <a:spcAft>
+                <a:spcPts val="13"/>
+              </a:spcAft>
+              <a:buClr>
+                <a:srgbClr val="000000"/>
+              </a:buClr>
+              <a:buSzPct val="100000"/>
+              <a:buFont typeface="Times New Roman" panose="02020603050405020304" pitchFamily="18" charset="0"/>
+              <a:tabLst>
+                <a:tab pos="914400" algn="l"/>
+                <a:tab pos="1828800" algn="l"/>
+                <a:tab pos="2743200" algn="l"/>
+                <a:tab pos="3657600" algn="l"/>
+                <a:tab pos="4572000" algn="l"/>
+              </a:tabLst>
+              <a:defRPr sz="3200">
+                <a:solidFill>
+                  <a:srgbClr val="000000"/>
+                </a:solidFill>
+                <a:latin typeface="Calibri" panose="020F0502020204030204" pitchFamily="34" charset="0"/>
+                <a:cs typeface="DejaVu Sans" charset="0"/>
+              </a:defRPr>
+            </a:lvl1pPr>
+            <a:lvl2pPr>
+              <a:lnSpc>
+                <a:spcPct val="83000"/>
+              </a:lnSpc>
+              <a:spcBef>
+                <a:spcPts val="1138"/>
+              </a:spcBef>
+              <a:spcAft>
+                <a:spcPts val="13"/>
+              </a:spcAft>
+              <a:buClr>
+                <a:srgbClr val="000000"/>
+              </a:buClr>
+              <a:buSzPct val="100000"/>
+              <a:buFont typeface="Times New Roman" panose="02020603050405020304" pitchFamily="18" charset="0"/>
+              <a:tabLst>
+                <a:tab pos="914400" algn="l"/>
+                <a:tab pos="1828800" algn="l"/>
+                <a:tab pos="2743200" algn="l"/>
+                <a:tab pos="3657600" algn="l"/>
+                <a:tab pos="4572000" algn="l"/>
+              </a:tabLst>
+              <a:defRPr sz="2400">
+                <a:solidFill>
+                  <a:srgbClr val="000000"/>
+                </a:solidFill>
+                <a:latin typeface="Calibri" panose="020F0502020204030204" pitchFamily="34" charset="0"/>
+                <a:cs typeface="DejaVu Sans" charset="0"/>
+              </a:defRPr>
+            </a:lvl2pPr>
+            <a:lvl3pPr>
+              <a:lnSpc>
+                <a:spcPct val="83000"/>
+              </a:lnSpc>
+              <a:spcBef>
+                <a:spcPts val="863"/>
+              </a:spcBef>
+              <a:spcAft>
+                <a:spcPts val="13"/>
+              </a:spcAft>
+              <a:buClr>
+                <a:srgbClr val="000000"/>
+              </a:buClr>
+              <a:buSzPct val="100000"/>
+              <a:buFont typeface="Times New Roman" panose="02020603050405020304" pitchFamily="18" charset="0"/>
+              <a:tabLst>
+                <a:tab pos="914400" algn="l"/>
+                <a:tab pos="1828800" algn="l"/>
+                <a:tab pos="2743200" algn="l"/>
+                <a:tab pos="3657600" algn="l"/>
+                <a:tab pos="4572000" algn="l"/>
+              </a:tabLst>
+              <a:defRPr sz="2000">
+                <a:solidFill>
+                  <a:srgbClr val="000000"/>
+                </a:solidFill>
+                <a:latin typeface="Calibri" panose="020F0502020204030204" pitchFamily="34" charset="0"/>
+                <a:cs typeface="DejaVu Sans" charset="0"/>
+              </a:defRPr>
+            </a:lvl3pPr>
+            <a:lvl4pPr>
+              <a:lnSpc>
+                <a:spcPct val="83000"/>
+              </a:lnSpc>
+              <a:spcBef>
+                <a:spcPts val="575"/>
+              </a:spcBef>
+              <a:spcAft>
+                <a:spcPts val="13"/>
+              </a:spcAft>
+              <a:buClr>
+                <a:srgbClr val="000000"/>
+              </a:buClr>
+              <a:buSzPct val="100000"/>
+              <a:buFont typeface="Times New Roman" panose="02020603050405020304" pitchFamily="18" charset="0"/>
+              <a:tabLst>
+                <a:tab pos="914400" algn="l"/>
+                <a:tab pos="1828800" algn="l"/>
+                <a:tab pos="2743200" algn="l"/>
+                <a:tab pos="3657600" algn="l"/>
+                <a:tab pos="4572000" algn="l"/>
+              </a:tabLst>
+              <a:defRPr sz="2000">
+                <a:solidFill>
+                  <a:srgbClr val="000000"/>
+                </a:solidFill>
+                <a:latin typeface="Calibri" panose="020F0502020204030204" pitchFamily="34" charset="0"/>
+                <a:cs typeface="DejaVu Sans" charset="0"/>
+              </a:defRPr>
+            </a:lvl4pPr>
+            <a:lvl5pPr>
+              <a:lnSpc>
+                <a:spcPct val="83000"/>
+              </a:lnSpc>
+              <a:spcBef>
+                <a:spcPts val="288"/>
+              </a:spcBef>
+              <a:spcAft>
+                <a:spcPts val="13"/>
+              </a:spcAft>
+              <a:buClr>
+                <a:srgbClr val="000000"/>
+              </a:buClr>
+              <a:buSzPct val="100000"/>
+              <a:buFont typeface="Times New Roman" panose="02020603050405020304" pitchFamily="18" charset="0"/>
+              <a:tabLst>
+                <a:tab pos="914400" algn="l"/>
+                <a:tab pos="1828800" algn="l"/>
+                <a:tab pos="2743200" algn="l"/>
+                <a:tab pos="3657600" algn="l"/>
+                <a:tab pos="4572000" algn="l"/>
+              </a:tabLst>
+              <a:defRPr sz="2000">
+                <a:solidFill>
+                  <a:srgbClr val="000000"/>
+                </a:solidFill>
+                <a:latin typeface="Calibri" panose="020F0502020204030204" pitchFamily="34" charset="0"/>
+                <a:cs typeface="DejaVu Sans" charset="0"/>
+              </a:defRPr>
+            </a:lvl5pPr>
+            <a:lvl6pPr marL="2514600" indent="-228600" eaLnBrk="0" fontAlgn="base" hangingPunct="0">
+              <a:lnSpc>
+                <a:spcPct val="83000"/>
+              </a:lnSpc>
+              <a:spcBef>
+                <a:spcPts val="288"/>
+              </a:spcBef>
+              <a:spcAft>
+                <a:spcPts val="13"/>
+              </a:spcAft>
+              <a:buClr>
+                <a:srgbClr val="000000"/>
+              </a:buClr>
+              <a:buSzPct val="100000"/>
+              <a:buFont typeface="Times New Roman" panose="02020603050405020304" pitchFamily="18" charset="0"/>
+              <a:tabLst>
+                <a:tab pos="914400" algn="l"/>
+                <a:tab pos="1828800" algn="l"/>
+                <a:tab pos="2743200" algn="l"/>
+                <a:tab pos="3657600" algn="l"/>
+                <a:tab pos="4572000" algn="l"/>
+              </a:tabLst>
+              <a:defRPr sz="2000">
+                <a:solidFill>
+                  <a:srgbClr val="000000"/>
+                </a:solidFill>
+                <a:latin typeface="Calibri" panose="020F0502020204030204" pitchFamily="34" charset="0"/>
+                <a:cs typeface="DejaVu Sans" charset="0"/>
+              </a:defRPr>
+            </a:lvl6pPr>
+            <a:lvl7pPr marL="2971800" indent="-228600" eaLnBrk="0" fontAlgn="base" hangingPunct="0">
+              <a:lnSpc>
+                <a:spcPct val="83000"/>
+              </a:lnSpc>
+              <a:spcBef>
+                <a:spcPts val="288"/>
+              </a:spcBef>
+              <a:spcAft>
+                <a:spcPts val="13"/>
+              </a:spcAft>
+              <a:buClr>
+                <a:srgbClr val="000000"/>
+              </a:buClr>
+              <a:buSzPct val="100000"/>
+              <a:buFont typeface="Times New Roman" panose="02020603050405020304" pitchFamily="18" charset="0"/>
+              <a:tabLst>
+                <a:tab pos="914400" algn="l"/>
+                <a:tab pos="1828800" algn="l"/>
+                <a:tab pos="2743200" algn="l"/>
+                <a:tab pos="3657600" algn="l"/>
+                <a:tab pos="4572000" algn="l"/>
+              </a:tabLst>
+              <a:defRPr sz="2000">
+                <a:solidFill>
+                  <a:srgbClr val="000000"/>
+                </a:solidFill>
+                <a:latin typeface="Calibri" panose="020F0502020204030204" pitchFamily="34" charset="0"/>
+                <a:cs typeface="DejaVu Sans" charset="0"/>
+              </a:defRPr>
+            </a:lvl7pPr>
+            <a:lvl8pPr marL="3429000" indent="-228600" eaLnBrk="0" fontAlgn="base" hangingPunct="0">
+              <a:lnSpc>
+                <a:spcPct val="83000"/>
+              </a:lnSpc>
+              <a:spcBef>
+                <a:spcPts val="288"/>
+              </a:spcBef>
+              <a:spcAft>
+                <a:spcPts val="13"/>
+              </a:spcAft>
+              <a:buClr>
+                <a:srgbClr val="000000"/>
+              </a:buClr>
+              <a:buSzPct val="100000"/>
+              <a:buFont typeface="Times New Roman" panose="02020603050405020304" pitchFamily="18" charset="0"/>
+              <a:tabLst>
+                <a:tab pos="914400" algn="l"/>
+                <a:tab pos="1828800" algn="l"/>
+                <a:tab pos="2743200" algn="l"/>
+                <a:tab pos="3657600" algn="l"/>
+                <a:tab pos="4572000" algn="l"/>
+              </a:tabLst>
+              <a:defRPr sz="2000">
+                <a:solidFill>
+                  <a:srgbClr val="000000"/>
+                </a:solidFill>
+                <a:latin typeface="Calibri" panose="020F0502020204030204" pitchFamily="34" charset="0"/>
+                <a:cs typeface="DejaVu Sans" charset="0"/>
+              </a:defRPr>
+            </a:lvl8pPr>
+            <a:lvl9pPr marL="3886200" indent="-228600" eaLnBrk="0" fontAlgn="base" hangingPunct="0">
+              <a:lnSpc>
+                <a:spcPct val="83000"/>
+              </a:lnSpc>
+              <a:spcBef>
+                <a:spcPts val="288"/>
+              </a:spcBef>
+              <a:spcAft>
+                <a:spcPts val="13"/>
+              </a:spcAft>
+              <a:buClr>
+                <a:srgbClr val="000000"/>
+              </a:buClr>
+              <a:buSzPct val="100000"/>
+              <a:buFont typeface="Times New Roman" panose="02020603050405020304" pitchFamily="18" charset="0"/>
+              <a:tabLst>
+                <a:tab pos="914400" algn="l"/>
+                <a:tab pos="1828800" algn="l"/>
+                <a:tab pos="2743200" algn="l"/>
+                <a:tab pos="3657600" algn="l"/>
+                <a:tab pos="4572000" algn="l"/>
+              </a:tabLst>
+              <a:defRPr sz="2000">
+                <a:solidFill>
+                  <a:srgbClr val="000000"/>
+                </a:solidFill>
+                <a:latin typeface="Calibri" panose="020F0502020204030204" pitchFamily="34" charset="0"/>
+                <a:cs typeface="DejaVu Sans" charset="0"/>
+              </a:defRPr>
+            </a:lvl9pPr>
+          </a:lstStyle>
+          <a:p>
+            <a:pPr eaLnBrk="1">
+              <a:lnSpc>
+                <a:spcPct val="100000"/>
+              </a:lnSpc>
+              <a:spcBef>
+                <a:spcPts val="13"/>
+              </a:spcBef>
+              <a:buClr>
+                <a:srgbClr val="0166B3"/>
+              </a:buClr>
+              <a:buFont typeface="Arial" panose="020B0604020202020204" pitchFamily="34" charset="0"/>
+              <a:buChar char="•"/>
+            </a:pPr>
+            <a:r>
+              <a:rPr lang="ru-RU" altLang="ru-RU" sz="1800" dirty="0">
+                <a:latin typeface="Arial" panose="020B0604020202020204" pitchFamily="34" charset="0"/>
+                <a:cs typeface="Arial" panose="020B0604020202020204" pitchFamily="34" charset="0"/>
+              </a:rPr>
+              <a:t>Оценка предполагаемого эффекта </a:t>
+            </a:r>
+            <a:br>
+              <a:rPr lang="ru-RU" altLang="ru-RU" sz="1800" dirty="0">
+                <a:latin typeface="Arial" panose="020B0604020202020204" pitchFamily="34" charset="0"/>
+                <a:cs typeface="Arial" panose="020B0604020202020204" pitchFamily="34" charset="0"/>
+              </a:rPr>
+            </a:br>
+            <a:r>
+              <a:rPr lang="ru-RU" altLang="ru-RU" sz="1800" dirty="0">
+                <a:latin typeface="Arial" panose="020B0604020202020204" pitchFamily="34" charset="0"/>
+                <a:cs typeface="Arial" panose="020B0604020202020204" pitchFamily="34" charset="0"/>
+              </a:rPr>
+              <a:t>с учетом применения предложенного решения.</a:t>
+            </a:r>
+          </a:p>
+        </p:txBody>
+      </p:sp>
+    </p:spTree>
+    <p:extLst>
+      <p:ext uri="{BB962C8B-B14F-4D97-AF65-F5344CB8AC3E}">
+        <p14:creationId xmlns:p14="http://schemas.microsoft.com/office/powerpoint/2010/main" val="3317676796"/>
+      </p:ext>
+    </p:extLst>
+  </p:cSld>
+  <p:clrMapOvr>
+    <a:masterClrMapping/>
+  </p:clrMapOvr>
+</p:sld>
+</file>
+
+<file path=ppt/slides/slide14.xml><?xml version="1.0" encoding="utf-8"?>
 <p:sld xmlns:a="http://schemas.openxmlformats.org/drawingml/2006/main" xmlns:r="http://schemas.openxmlformats.org/officeDocument/2006/relationships" xmlns:p="http://schemas.openxmlformats.org/presentationml/2006/main">
   <p:cSld>
     <p:spTree>
@@ -5158,7 +5924,7 @@
                 <a:ea typeface="Roboto" panose="02000000000000000000" pitchFamily="2" charset="0"/>
                 <a:cs typeface="Arial" panose="020B0604020202020204" pitchFamily="34" charset="0"/>
               </a:rPr>
-              <a:t>Свое решение представила команда «НАЗВАНИЕ» в составе:</a:t>
+              <a:t>Свое решение представила команда «Ом уполномочен заявить» в составе:</a:t>
             </a:r>
           </a:p>
         </p:txBody>
@@ -5194,62 +5960,6 @@
       </p:pic>
       <p:sp>
         <p:nvSpPr>
-          <p:cNvPr id="20" name="Прямоугольник 19">
-            <a:extLst>
-              <a:ext uri="{FF2B5EF4-FFF2-40B4-BE49-F238E27FC236}">
-                <a16:creationId xmlns:a16="http://schemas.microsoft.com/office/drawing/2014/main" id="{95990225-9EA8-43F7-A0D0-1E00F7CA929A}"/>
-              </a:ext>
-            </a:extLst>
-          </p:cNvPr>
-          <p:cNvSpPr/>
-          <p:nvPr/>
-        </p:nvSpPr>
-        <p:spPr>
-          <a:xfrm>
-            <a:off x="343920" y="3510142"/>
-            <a:ext cx="1565813" cy="523220"/>
-          </a:xfrm>
-          <a:prstGeom prst="rect">
-            <a:avLst/>
-          </a:prstGeom>
-        </p:spPr>
-        <p:txBody>
-          <a:bodyPr wrap="none">
-            <a:spAutoFit/>
-          </a:bodyPr>
-          <a:lstStyle/>
-          <a:p>
-            <a:r>
-              <a:rPr lang="ru-RU" sz="1600" spc="20" dirty="0">
-                <a:solidFill>
-                  <a:srgbClr val="2E56A8"/>
-                </a:solidFill>
-                <a:latin typeface="Arial" panose="020B0604020202020204" pitchFamily="34" charset="0"/>
-                <a:ea typeface="Roboto" panose="02000000000000000000" pitchFamily="2" charset="0"/>
-                <a:cs typeface="Arial" panose="020B0604020202020204" pitchFamily="34" charset="0"/>
-              </a:rPr>
-              <a:t>Имя Фамилия</a:t>
-            </a:r>
-          </a:p>
-          <a:p>
-            <a:r>
-              <a:rPr lang="ru-RU" sz="1200" spc="20" dirty="0">
-                <a:latin typeface="Arial" panose="020B0604020202020204" pitchFamily="34" charset="0"/>
-                <a:ea typeface="Roboto" panose="02000000000000000000" pitchFamily="2" charset="0"/>
-                <a:cs typeface="Arial" panose="020B0604020202020204" pitchFamily="34" charset="0"/>
-              </a:rPr>
-              <a:t>Роль в команде</a:t>
-            </a:r>
-            <a:endParaRPr lang="ru-RU" sz="1200" dirty="0">
-              <a:latin typeface="Arial" panose="020B0604020202020204" pitchFamily="34" charset="0"/>
-              <a:ea typeface="Roboto" panose="02000000000000000000" pitchFamily="2" charset="0"/>
-              <a:cs typeface="Arial" panose="020B0604020202020204" pitchFamily="34" charset="0"/>
-            </a:endParaRPr>
-          </a:p>
-        </p:txBody>
-      </p:sp>
-      <p:sp>
-        <p:nvSpPr>
           <p:cNvPr id="21" name="Прямоугольник 20">
             <a:extLst>
               <a:ext uri="{FF2B5EF4-FFF2-40B4-BE49-F238E27FC236}">
@@ -5283,28 +5993,15 @@
               </a:rPr>
               <a:t>Коротко об участнике: какие задачи решал, опыт участия в аналогичных проектах, вклад </a:t>
             </a:r>
-            <a:endParaRPr lang="ru-RU" sz="1000" spc="20" dirty="0" smtClean="0">
-              <a:latin typeface="Arial" panose="020B0604020202020204" pitchFamily="34" charset="0"/>
-              <a:ea typeface="Roboto" panose="02000000000000000000" pitchFamily="2" charset="0"/>
-              <a:cs typeface="Arial" panose="020B0604020202020204" pitchFamily="34" charset="0"/>
-            </a:endParaRPr>
           </a:p>
           <a:p>
-            <a:r>
-              <a:rPr lang="ru-RU" sz="1000" spc="20" dirty="0" smtClean="0">
-                <a:latin typeface="Arial" panose="020B0604020202020204" pitchFamily="34" charset="0"/>
-                <a:ea typeface="Roboto" panose="02000000000000000000" pitchFamily="2" charset="0"/>
-                <a:cs typeface="Arial" panose="020B0604020202020204" pitchFamily="34" charset="0"/>
-              </a:rPr>
-              <a:t>в </a:t>
-            </a:r>
             <a:r>
               <a:rPr lang="ru-RU" sz="1000" spc="20" dirty="0">
                 <a:latin typeface="Arial" panose="020B0604020202020204" pitchFamily="34" charset="0"/>
                 <a:ea typeface="Roboto" panose="02000000000000000000" pitchFamily="2" charset="0"/>
                 <a:cs typeface="Arial" panose="020B0604020202020204" pitchFamily="34" charset="0"/>
               </a:rPr>
-              <a:t>решение кейса</a:t>
+              <a:t>в решение кейса</a:t>
             </a:r>
             <a:endParaRPr lang="ru-RU" sz="1000" dirty="0">
               <a:latin typeface="Arial" panose="020B0604020202020204" pitchFamily="34" charset="0"/>
@@ -5345,62 +6042,6 @@
       </p:pic>
       <p:sp>
         <p:nvSpPr>
-          <p:cNvPr id="25" name="Прямоугольник 24">
-            <a:extLst>
-              <a:ext uri="{FF2B5EF4-FFF2-40B4-BE49-F238E27FC236}">
-                <a16:creationId xmlns:a16="http://schemas.microsoft.com/office/drawing/2014/main" id="{0D671F29-2B92-40B2-827B-B8CBF4F30D0E}"/>
-              </a:ext>
-            </a:extLst>
-          </p:cNvPr>
-          <p:cNvSpPr/>
-          <p:nvPr/>
-        </p:nvSpPr>
-        <p:spPr>
-          <a:xfrm>
-            <a:off x="2496286" y="3510142"/>
-            <a:ext cx="1565813" cy="523220"/>
-          </a:xfrm>
-          <a:prstGeom prst="rect">
-            <a:avLst/>
-          </a:prstGeom>
-        </p:spPr>
-        <p:txBody>
-          <a:bodyPr wrap="none">
-            <a:spAutoFit/>
-          </a:bodyPr>
-          <a:lstStyle/>
-          <a:p>
-            <a:r>
-              <a:rPr lang="ru-RU" sz="1600" spc="20" dirty="0">
-                <a:solidFill>
-                  <a:srgbClr val="2E56A8"/>
-                </a:solidFill>
-                <a:latin typeface="Arial" panose="020B0604020202020204" pitchFamily="34" charset="0"/>
-                <a:ea typeface="Roboto" panose="02000000000000000000" pitchFamily="2" charset="0"/>
-                <a:cs typeface="Arial" panose="020B0604020202020204" pitchFamily="34" charset="0"/>
-              </a:rPr>
-              <a:t>Имя Фамилия</a:t>
-            </a:r>
-          </a:p>
-          <a:p>
-            <a:r>
-              <a:rPr lang="ru-RU" sz="1200" spc="20" dirty="0">
-                <a:latin typeface="Arial" panose="020B0604020202020204" pitchFamily="34" charset="0"/>
-                <a:ea typeface="Roboto" panose="02000000000000000000" pitchFamily="2" charset="0"/>
-                <a:cs typeface="Arial" panose="020B0604020202020204" pitchFamily="34" charset="0"/>
-              </a:rPr>
-              <a:t>Роль в команде</a:t>
-            </a:r>
-            <a:endParaRPr lang="ru-RU" sz="1200" dirty="0">
-              <a:latin typeface="Arial" panose="020B0604020202020204" pitchFamily="34" charset="0"/>
-              <a:ea typeface="Roboto" panose="02000000000000000000" pitchFamily="2" charset="0"/>
-              <a:cs typeface="Arial" panose="020B0604020202020204" pitchFamily="34" charset="0"/>
-            </a:endParaRPr>
-          </a:p>
-        </p:txBody>
-      </p:sp>
-      <p:sp>
-        <p:nvSpPr>
           <p:cNvPr id="26" name="Прямоугольник 25">
             <a:extLst>
               <a:ext uri="{FF2B5EF4-FFF2-40B4-BE49-F238E27FC236}">
@@ -5434,28 +6075,15 @@
               </a:rPr>
               <a:t>Коротко об участнике: какие задачи решал, опыт участия в аналогичных проектах, вклад </a:t>
             </a:r>
-            <a:endParaRPr lang="ru-RU" sz="1000" spc="20" dirty="0" smtClean="0">
-              <a:latin typeface="Arial" panose="020B0604020202020204" pitchFamily="34" charset="0"/>
-              <a:ea typeface="Roboto" panose="02000000000000000000" pitchFamily="2" charset="0"/>
-              <a:cs typeface="Arial" panose="020B0604020202020204" pitchFamily="34" charset="0"/>
-            </a:endParaRPr>
           </a:p>
           <a:p>
-            <a:r>
-              <a:rPr lang="ru-RU" sz="1000" spc="20" dirty="0" smtClean="0">
-                <a:latin typeface="Arial" panose="020B0604020202020204" pitchFamily="34" charset="0"/>
-                <a:ea typeface="Roboto" panose="02000000000000000000" pitchFamily="2" charset="0"/>
-                <a:cs typeface="Arial" panose="020B0604020202020204" pitchFamily="34" charset="0"/>
-              </a:rPr>
-              <a:t>в </a:t>
-            </a:r>
             <a:r>
               <a:rPr lang="ru-RU" sz="1000" spc="20" dirty="0">
                 <a:latin typeface="Arial" panose="020B0604020202020204" pitchFamily="34" charset="0"/>
                 <a:ea typeface="Roboto" panose="02000000000000000000" pitchFamily="2" charset="0"/>
                 <a:cs typeface="Arial" panose="020B0604020202020204" pitchFamily="34" charset="0"/>
               </a:rPr>
-              <a:t>решение кейса</a:t>
+              <a:t>в решение кейса</a:t>
             </a:r>
             <a:endParaRPr lang="ru-RU" sz="1000" dirty="0">
               <a:latin typeface="Arial" panose="020B0604020202020204" pitchFamily="34" charset="0"/>
@@ -5496,62 +6124,6 @@
       </p:pic>
       <p:sp>
         <p:nvSpPr>
-          <p:cNvPr id="35" name="Прямоугольник 34">
-            <a:extLst>
-              <a:ext uri="{FF2B5EF4-FFF2-40B4-BE49-F238E27FC236}">
-                <a16:creationId xmlns:a16="http://schemas.microsoft.com/office/drawing/2014/main" id="{B6BA645E-A61F-4C00-BB14-C9AE76BA30EA}"/>
-              </a:ext>
-            </a:extLst>
-          </p:cNvPr>
-          <p:cNvSpPr/>
-          <p:nvPr/>
-        </p:nvSpPr>
-        <p:spPr>
-          <a:xfrm>
-            <a:off x="4648652" y="3510142"/>
-            <a:ext cx="1565813" cy="523220"/>
-          </a:xfrm>
-          <a:prstGeom prst="rect">
-            <a:avLst/>
-          </a:prstGeom>
-        </p:spPr>
-        <p:txBody>
-          <a:bodyPr wrap="none">
-            <a:spAutoFit/>
-          </a:bodyPr>
-          <a:lstStyle/>
-          <a:p>
-            <a:r>
-              <a:rPr lang="ru-RU" sz="1600" spc="20" dirty="0">
-                <a:solidFill>
-                  <a:srgbClr val="2E56A8"/>
-                </a:solidFill>
-                <a:latin typeface="Arial" panose="020B0604020202020204" pitchFamily="34" charset="0"/>
-                <a:ea typeface="Roboto" panose="02000000000000000000" pitchFamily="2" charset="0"/>
-                <a:cs typeface="Arial" panose="020B0604020202020204" pitchFamily="34" charset="0"/>
-              </a:rPr>
-              <a:t>Имя Фамилия</a:t>
-            </a:r>
-          </a:p>
-          <a:p>
-            <a:r>
-              <a:rPr lang="ru-RU" sz="1200" spc="20" dirty="0">
-                <a:latin typeface="Arial" panose="020B0604020202020204" pitchFamily="34" charset="0"/>
-                <a:ea typeface="Roboto" panose="02000000000000000000" pitchFamily="2" charset="0"/>
-                <a:cs typeface="Arial" panose="020B0604020202020204" pitchFamily="34" charset="0"/>
-              </a:rPr>
-              <a:t>Роль в команде</a:t>
-            </a:r>
-            <a:endParaRPr lang="ru-RU" sz="1200" dirty="0">
-              <a:latin typeface="Arial" panose="020B0604020202020204" pitchFamily="34" charset="0"/>
-              <a:ea typeface="Roboto" panose="02000000000000000000" pitchFamily="2" charset="0"/>
-              <a:cs typeface="Arial" panose="020B0604020202020204" pitchFamily="34" charset="0"/>
-            </a:endParaRPr>
-          </a:p>
-        </p:txBody>
-      </p:sp>
-      <p:sp>
-        <p:nvSpPr>
           <p:cNvPr id="39" name="Прямоугольник 38">
             <a:extLst>
               <a:ext uri="{FF2B5EF4-FFF2-40B4-BE49-F238E27FC236}">
@@ -5585,28 +6157,15 @@
               </a:rPr>
               <a:t>Коротко об участнике: какие задачи решал, опыт участия в аналогичных проектах, вклад </a:t>
             </a:r>
-            <a:endParaRPr lang="ru-RU" sz="1000" spc="20" dirty="0" smtClean="0">
-              <a:latin typeface="Arial" panose="020B0604020202020204" pitchFamily="34" charset="0"/>
-              <a:ea typeface="Roboto" panose="02000000000000000000" pitchFamily="2" charset="0"/>
-              <a:cs typeface="Arial" panose="020B0604020202020204" pitchFamily="34" charset="0"/>
-            </a:endParaRPr>
           </a:p>
           <a:p>
-            <a:r>
-              <a:rPr lang="ru-RU" sz="1000" spc="20" dirty="0" smtClean="0">
-                <a:latin typeface="Arial" panose="020B0604020202020204" pitchFamily="34" charset="0"/>
-                <a:ea typeface="Roboto" panose="02000000000000000000" pitchFamily="2" charset="0"/>
-                <a:cs typeface="Arial" panose="020B0604020202020204" pitchFamily="34" charset="0"/>
-              </a:rPr>
-              <a:t>в </a:t>
-            </a:r>
             <a:r>
               <a:rPr lang="ru-RU" sz="1000" spc="20" dirty="0">
                 <a:latin typeface="Arial" panose="020B0604020202020204" pitchFamily="34" charset="0"/>
                 <a:ea typeface="Roboto" panose="02000000000000000000" pitchFamily="2" charset="0"/>
                 <a:cs typeface="Arial" panose="020B0604020202020204" pitchFamily="34" charset="0"/>
               </a:rPr>
-              <a:t>решение кейса</a:t>
+              <a:t>в решение кейса</a:t>
             </a:r>
             <a:endParaRPr lang="ru-RU" sz="1000" dirty="0">
               <a:latin typeface="Arial" panose="020B0604020202020204" pitchFamily="34" charset="0"/>
@@ -5647,62 +6206,6 @@
       </p:pic>
       <p:sp>
         <p:nvSpPr>
-          <p:cNvPr id="41" name="Прямоугольник 40">
-            <a:extLst>
-              <a:ext uri="{FF2B5EF4-FFF2-40B4-BE49-F238E27FC236}">
-                <a16:creationId xmlns:a16="http://schemas.microsoft.com/office/drawing/2014/main" id="{99A16D46-996F-449D-899E-B81131297C11}"/>
-              </a:ext>
-            </a:extLst>
-          </p:cNvPr>
-          <p:cNvSpPr/>
-          <p:nvPr/>
-        </p:nvSpPr>
-        <p:spPr>
-          <a:xfrm>
-            <a:off x="6801019" y="3510142"/>
-            <a:ext cx="1565813" cy="523220"/>
-          </a:xfrm>
-          <a:prstGeom prst="rect">
-            <a:avLst/>
-          </a:prstGeom>
-        </p:spPr>
-        <p:txBody>
-          <a:bodyPr wrap="none">
-            <a:spAutoFit/>
-          </a:bodyPr>
-          <a:lstStyle/>
-          <a:p>
-            <a:r>
-              <a:rPr lang="ru-RU" sz="1600" spc="20" dirty="0">
-                <a:solidFill>
-                  <a:srgbClr val="2E56A8"/>
-                </a:solidFill>
-                <a:latin typeface="Arial" panose="020B0604020202020204" pitchFamily="34" charset="0"/>
-                <a:ea typeface="Roboto" panose="02000000000000000000" pitchFamily="2" charset="0"/>
-                <a:cs typeface="Arial" panose="020B0604020202020204" pitchFamily="34" charset="0"/>
-              </a:rPr>
-              <a:t>Имя Фамилия</a:t>
-            </a:r>
-          </a:p>
-          <a:p>
-            <a:r>
-              <a:rPr lang="ru-RU" sz="1200" spc="20" dirty="0">
-                <a:latin typeface="Arial" panose="020B0604020202020204" pitchFamily="34" charset="0"/>
-                <a:ea typeface="Roboto" panose="02000000000000000000" pitchFamily="2" charset="0"/>
-                <a:cs typeface="Arial" panose="020B0604020202020204" pitchFamily="34" charset="0"/>
-              </a:rPr>
-              <a:t>Роль в команде</a:t>
-            </a:r>
-            <a:endParaRPr lang="ru-RU" sz="1200" dirty="0">
-              <a:latin typeface="Arial" panose="020B0604020202020204" pitchFamily="34" charset="0"/>
-              <a:ea typeface="Roboto" panose="02000000000000000000" pitchFamily="2" charset="0"/>
-              <a:cs typeface="Arial" panose="020B0604020202020204" pitchFamily="34" charset="0"/>
-            </a:endParaRPr>
-          </a:p>
-        </p:txBody>
-      </p:sp>
-      <p:sp>
-        <p:nvSpPr>
           <p:cNvPr id="42" name="Прямоугольник 41">
             <a:extLst>
               <a:ext uri="{FF2B5EF4-FFF2-40B4-BE49-F238E27FC236}">
@@ -5736,28 +6239,15 @@
               </a:rPr>
               <a:t>Коротко об участнике: какие задачи решал, опыт участия в аналогичных проектах, вклад </a:t>
             </a:r>
-            <a:endParaRPr lang="ru-RU" sz="1000" spc="20" dirty="0" smtClean="0">
-              <a:latin typeface="Arial" panose="020B0604020202020204" pitchFamily="34" charset="0"/>
-              <a:ea typeface="Roboto" panose="02000000000000000000" pitchFamily="2" charset="0"/>
-              <a:cs typeface="Arial" panose="020B0604020202020204" pitchFamily="34" charset="0"/>
-            </a:endParaRPr>
           </a:p>
           <a:p>
-            <a:r>
-              <a:rPr lang="ru-RU" sz="1000" spc="20" dirty="0" smtClean="0">
-                <a:latin typeface="Arial" panose="020B0604020202020204" pitchFamily="34" charset="0"/>
-                <a:ea typeface="Roboto" panose="02000000000000000000" pitchFamily="2" charset="0"/>
-                <a:cs typeface="Arial" panose="020B0604020202020204" pitchFamily="34" charset="0"/>
-              </a:rPr>
-              <a:t>в </a:t>
-            </a:r>
             <a:r>
               <a:rPr lang="ru-RU" sz="1000" spc="20" dirty="0">
                 <a:latin typeface="Arial" panose="020B0604020202020204" pitchFamily="34" charset="0"/>
                 <a:ea typeface="Roboto" panose="02000000000000000000" pitchFamily="2" charset="0"/>
                 <a:cs typeface="Arial" panose="020B0604020202020204" pitchFamily="34" charset="0"/>
               </a:rPr>
-              <a:t>решение кейса</a:t>
+              <a:t>в решение кейса</a:t>
             </a:r>
             <a:endParaRPr lang="ru-RU" sz="1000" dirty="0">
               <a:latin typeface="Arial" panose="020B0604020202020204" pitchFamily="34" charset="0"/>
@@ -5795,7 +6285,7 @@
                 <a:latin typeface="Arial Narrow" panose="020B0606020202030204" pitchFamily="34" charset="0"/>
               </a:rPr>
               <a:pPr/>
-              <a:t>13</a:t>
+              <a:t>14</a:t>
             </a:fld>
             <a:endParaRPr lang="ru-RU" altLang="ru-RU" sz="1000" dirty="0">
               <a:solidFill>
@@ -5975,7 +6465,7 @@
           <a:p>
             <a:pPr algn="l" eaLnBrk="1" hangingPunct="1"/>
             <a:r>
-              <a:rPr lang="ru-RU" altLang="ru-RU" sz="2000" b="1" dirty="0" smtClean="0">
+              <a:rPr lang="ru-RU" altLang="ru-RU" sz="2000" b="1" dirty="0">
                 <a:solidFill>
                   <a:srgbClr val="2E56A8"/>
                 </a:solidFill>
@@ -5985,14 +6475,6 @@
               </a:rPr>
               <a:t>«Спасибо за внимание!»</a:t>
             </a:r>
-            <a:endParaRPr lang="ru-RU" altLang="ru-RU" sz="2000" b="1" dirty="0">
-              <a:solidFill>
-                <a:srgbClr val="2E56A8"/>
-              </a:solidFill>
-              <a:latin typeface="Arial" panose="020B0604020202020204" pitchFamily="34" charset="0"/>
-              <a:ea typeface="Roboto" panose="02000000000000000000" pitchFamily="2" charset="0"/>
-              <a:cs typeface="Arial" panose="020B0604020202020204" pitchFamily="34" charset="0"/>
-            </a:endParaRPr>
           </a:p>
         </p:txBody>
       </p:sp>
@@ -6026,6 +6508,230 @@
           </a:prstGeom>
         </p:spPr>
       </p:pic>
+      <p:sp>
+        <p:nvSpPr>
+          <p:cNvPr id="2" name="Прямоугольник 1">
+            <a:extLst>
+              <a:ext uri="{FF2B5EF4-FFF2-40B4-BE49-F238E27FC236}">
+                <a16:creationId xmlns:a16="http://schemas.microsoft.com/office/drawing/2014/main" id="{B9A0C4A5-FA11-56F1-E6E0-02237ECE9AB2}"/>
+              </a:ext>
+            </a:extLst>
+          </p:cNvPr>
+          <p:cNvSpPr/>
+          <p:nvPr/>
+        </p:nvSpPr>
+        <p:spPr>
+          <a:xfrm>
+            <a:off x="343920" y="3510142"/>
+            <a:ext cx="2083904" cy="523220"/>
+          </a:xfrm>
+          <a:prstGeom prst="rect">
+            <a:avLst/>
+          </a:prstGeom>
+        </p:spPr>
+        <p:txBody>
+          <a:bodyPr wrap="none">
+            <a:spAutoFit/>
+          </a:bodyPr>
+          <a:lstStyle/>
+          <a:p>
+            <a:r>
+              <a:rPr lang="ru-RU" sz="1600" spc="20" dirty="0">
+                <a:solidFill>
+                  <a:srgbClr val="2E56A8"/>
+                </a:solidFill>
+                <a:latin typeface="Arial" panose="020B0604020202020204" pitchFamily="34" charset="0"/>
+                <a:ea typeface="Roboto" panose="02000000000000000000" pitchFamily="2" charset="0"/>
+                <a:cs typeface="Arial" panose="020B0604020202020204" pitchFamily="34" charset="0"/>
+              </a:rPr>
+              <a:t>Матвей Никифоров</a:t>
+            </a:r>
+          </a:p>
+          <a:p>
+            <a:r>
+              <a:rPr lang="ru-RU" sz="1200" spc="20" dirty="0">
+                <a:latin typeface="Arial" panose="020B0604020202020204" pitchFamily="34" charset="0"/>
+                <a:ea typeface="Roboto" panose="02000000000000000000" pitchFamily="2" charset="0"/>
+                <a:cs typeface="Arial" panose="020B0604020202020204" pitchFamily="34" charset="0"/>
+              </a:rPr>
+              <a:t>Капитан команды</a:t>
+            </a:r>
+            <a:endParaRPr lang="ru-RU" sz="1200" dirty="0">
+              <a:latin typeface="Arial" panose="020B0604020202020204" pitchFamily="34" charset="0"/>
+              <a:ea typeface="Roboto" panose="02000000000000000000" pitchFamily="2" charset="0"/>
+              <a:cs typeface="Arial" panose="020B0604020202020204" pitchFamily="34" charset="0"/>
+            </a:endParaRPr>
+          </a:p>
+        </p:txBody>
+      </p:sp>
+      <p:sp>
+        <p:nvSpPr>
+          <p:cNvPr id="3" name="Прямоугольник 2">
+            <a:extLst>
+              <a:ext uri="{FF2B5EF4-FFF2-40B4-BE49-F238E27FC236}">
+                <a16:creationId xmlns:a16="http://schemas.microsoft.com/office/drawing/2014/main" id="{C935E706-749E-308B-1206-582EC6122E1D}"/>
+              </a:ext>
+            </a:extLst>
+          </p:cNvPr>
+          <p:cNvSpPr/>
+          <p:nvPr/>
+        </p:nvSpPr>
+        <p:spPr>
+          <a:xfrm>
+            <a:off x="2496286" y="3510142"/>
+            <a:ext cx="2218877" cy="523220"/>
+          </a:xfrm>
+          <a:prstGeom prst="rect">
+            <a:avLst/>
+          </a:prstGeom>
+        </p:spPr>
+        <p:txBody>
+          <a:bodyPr wrap="none">
+            <a:spAutoFit/>
+          </a:bodyPr>
+          <a:lstStyle/>
+          <a:p>
+            <a:r>
+              <a:rPr lang="ru-RU" sz="1600" spc="20" dirty="0">
+                <a:solidFill>
+                  <a:srgbClr val="2E56A8"/>
+                </a:solidFill>
+                <a:latin typeface="Arial" panose="020B0604020202020204" pitchFamily="34" charset="0"/>
+                <a:ea typeface="Roboto" panose="02000000000000000000" pitchFamily="2" charset="0"/>
+                <a:cs typeface="Arial" panose="020B0604020202020204" pitchFamily="34" charset="0"/>
+              </a:rPr>
+              <a:t>Александр Белоусов</a:t>
+            </a:r>
+          </a:p>
+          <a:p>
+            <a:r>
+              <a:rPr lang="ru-RU" sz="1200" spc="20" dirty="0">
+                <a:latin typeface="Arial" panose="020B0604020202020204" pitchFamily="34" charset="0"/>
+                <a:ea typeface="Roboto" panose="02000000000000000000" pitchFamily="2" charset="0"/>
+                <a:cs typeface="Arial" panose="020B0604020202020204" pitchFamily="34" charset="0"/>
+              </a:rPr>
+              <a:t>Роль в команде</a:t>
+            </a:r>
+            <a:endParaRPr lang="ru-RU" sz="1200" dirty="0">
+              <a:latin typeface="Arial" panose="020B0604020202020204" pitchFamily="34" charset="0"/>
+              <a:ea typeface="Roboto" panose="02000000000000000000" pitchFamily="2" charset="0"/>
+              <a:cs typeface="Arial" panose="020B0604020202020204" pitchFamily="34" charset="0"/>
+            </a:endParaRPr>
+          </a:p>
+        </p:txBody>
+      </p:sp>
+      <p:sp>
+        <p:nvSpPr>
+          <p:cNvPr id="4" name="Прямоугольник 3">
+            <a:extLst>
+              <a:ext uri="{FF2B5EF4-FFF2-40B4-BE49-F238E27FC236}">
+                <a16:creationId xmlns:a16="http://schemas.microsoft.com/office/drawing/2014/main" id="{8F3136B6-82A4-8F46-4703-1108768613D0}"/>
+              </a:ext>
+            </a:extLst>
+          </p:cNvPr>
+          <p:cNvSpPr/>
+          <p:nvPr/>
+        </p:nvSpPr>
+        <p:spPr>
+          <a:xfrm>
+            <a:off x="4648652" y="3510142"/>
+            <a:ext cx="1689437" cy="523220"/>
+          </a:xfrm>
+          <a:prstGeom prst="rect">
+            <a:avLst/>
+          </a:prstGeom>
+        </p:spPr>
+        <p:txBody>
+          <a:bodyPr wrap="none">
+            <a:spAutoFit/>
+          </a:bodyPr>
+          <a:lstStyle/>
+          <a:p>
+            <a:r>
+              <a:rPr lang="ru-RU" sz="1600" spc="20" dirty="0">
+                <a:solidFill>
+                  <a:srgbClr val="2E56A8"/>
+                </a:solidFill>
+                <a:latin typeface="Arial" panose="020B0604020202020204" pitchFamily="34" charset="0"/>
+                <a:ea typeface="Roboto" panose="02000000000000000000" pitchFamily="2" charset="0"/>
+                <a:cs typeface="Arial" panose="020B0604020202020204" pitchFamily="34" charset="0"/>
+              </a:rPr>
+              <a:t>Курышкин Глеб</a:t>
+            </a:r>
+          </a:p>
+          <a:p>
+            <a:r>
+              <a:rPr lang="ru-RU" sz="1200" spc="20" dirty="0">
+                <a:latin typeface="Arial" panose="020B0604020202020204" pitchFamily="34" charset="0"/>
+                <a:ea typeface="Roboto" panose="02000000000000000000" pitchFamily="2" charset="0"/>
+                <a:cs typeface="Arial" panose="020B0604020202020204" pitchFamily="34" charset="0"/>
+              </a:rPr>
+              <a:t>Роль в команде</a:t>
+            </a:r>
+            <a:endParaRPr lang="ru-RU" sz="1200" dirty="0">
+              <a:latin typeface="Arial" panose="020B0604020202020204" pitchFamily="34" charset="0"/>
+              <a:ea typeface="Roboto" panose="02000000000000000000" pitchFamily="2" charset="0"/>
+              <a:cs typeface="Arial" panose="020B0604020202020204" pitchFamily="34" charset="0"/>
+            </a:endParaRPr>
+          </a:p>
+        </p:txBody>
+      </p:sp>
+      <p:sp>
+        <p:nvSpPr>
+          <p:cNvPr id="5" name="Прямоугольник 4">
+            <a:extLst>
+              <a:ext uri="{FF2B5EF4-FFF2-40B4-BE49-F238E27FC236}">
+                <a16:creationId xmlns:a16="http://schemas.microsoft.com/office/drawing/2014/main" id="{49C90B64-BDAD-23D1-B743-1BF908933B02}"/>
+              </a:ext>
+            </a:extLst>
+          </p:cNvPr>
+          <p:cNvSpPr/>
+          <p:nvPr/>
+        </p:nvSpPr>
+        <p:spPr>
+          <a:xfrm>
+            <a:off x="6801019" y="3510142"/>
+            <a:ext cx="1862754" cy="523220"/>
+          </a:xfrm>
+          <a:prstGeom prst="rect">
+            <a:avLst/>
+          </a:prstGeom>
+        </p:spPr>
+        <p:txBody>
+          <a:bodyPr wrap="none">
+            <a:spAutoFit/>
+          </a:bodyPr>
+          <a:lstStyle/>
+          <a:p>
+            <a:r>
+              <a:rPr lang="ru-RU" sz="1600" spc="20" dirty="0">
+                <a:solidFill>
+                  <a:srgbClr val="2E56A8"/>
+                </a:solidFill>
+                <a:latin typeface="Arial" panose="020B0604020202020204" pitchFamily="34" charset="0"/>
+                <a:ea typeface="Roboto" panose="02000000000000000000" pitchFamily="2" charset="0"/>
+                <a:cs typeface="Arial" panose="020B0604020202020204" pitchFamily="34" charset="0"/>
+              </a:rPr>
+              <a:t>Демешко Кирилл</a:t>
+            </a:r>
+          </a:p>
+          <a:p>
+            <a:r>
+              <a:rPr lang="ru-RU" sz="1200" spc="20" dirty="0">
+                <a:latin typeface="Arial" panose="020B0604020202020204" pitchFamily="34" charset="0"/>
+                <a:ea typeface="Roboto" panose="02000000000000000000" pitchFamily="2" charset="0"/>
+                <a:cs typeface="Arial" panose="020B0604020202020204" pitchFamily="34" charset="0"/>
+              </a:rPr>
+              <a:t>Роль в команде</a:t>
+            </a:r>
+            <a:endParaRPr lang="ru-RU" sz="1200" dirty="0">
+              <a:latin typeface="Arial" panose="020B0604020202020204" pitchFamily="34" charset="0"/>
+              <a:ea typeface="Roboto" panose="02000000000000000000" pitchFamily="2" charset="0"/>
+              <a:cs typeface="Arial" panose="020B0604020202020204" pitchFamily="34" charset="0"/>
+            </a:endParaRPr>
+          </a:p>
+        </p:txBody>
+      </p:sp>
     </p:spTree>
     <p:extLst>
       <p:ext uri="{BB962C8B-B14F-4D97-AF65-F5344CB8AC3E}">
@@ -6100,7 +6806,7 @@
         <p:spPr>
           <a:xfrm>
             <a:off x="343920" y="3510142"/>
-            <a:ext cx="1565813" cy="523220"/>
+            <a:ext cx="2083904" cy="523220"/>
           </a:xfrm>
           <a:prstGeom prst="rect">
             <a:avLst/>
@@ -6121,7 +6827,7 @@
                 <a:ea typeface="Roboto" panose="02000000000000000000" pitchFamily="2" charset="0"/>
                 <a:cs typeface="Arial" panose="020B0604020202020204" pitchFamily="34" charset="0"/>
               </a:rPr>
-              <a:t>Имя Фамилия</a:t>
+              <a:t>Матвей Никифоров</a:t>
             </a:r>
           </a:p>
           <a:p>
@@ -6131,7 +6837,7 @@
                 <a:ea typeface="Roboto" panose="02000000000000000000" pitchFamily="2" charset="0"/>
                 <a:cs typeface="Arial" panose="020B0604020202020204" pitchFamily="34" charset="0"/>
               </a:rPr>
-              <a:t>Роль в команде</a:t>
+              <a:t>Капитан команды</a:t>
             </a:r>
             <a:endParaRPr lang="ru-RU" sz="1200" dirty="0">
               <a:latin typeface="Arial" panose="020B0604020202020204" pitchFamily="34" charset="0"/>
@@ -6176,28 +6882,15 @@
               </a:rPr>
               <a:t>Коротко об участнике: какие задачи решал, опыт участия в аналогичных проектах, вклад </a:t>
             </a:r>
-            <a:endParaRPr lang="ru-RU" sz="1000" spc="20" dirty="0" smtClean="0">
-              <a:latin typeface="Arial" panose="020B0604020202020204" pitchFamily="34" charset="0"/>
-              <a:ea typeface="Roboto" panose="02000000000000000000" pitchFamily="2" charset="0"/>
-              <a:cs typeface="Arial" panose="020B0604020202020204" pitchFamily="34" charset="0"/>
-            </a:endParaRPr>
           </a:p>
           <a:p>
-            <a:r>
-              <a:rPr lang="ru-RU" sz="1000" spc="20" dirty="0" smtClean="0">
-                <a:latin typeface="Arial" panose="020B0604020202020204" pitchFamily="34" charset="0"/>
-                <a:ea typeface="Roboto" panose="02000000000000000000" pitchFamily="2" charset="0"/>
-                <a:cs typeface="Arial" panose="020B0604020202020204" pitchFamily="34" charset="0"/>
-              </a:rPr>
-              <a:t>в </a:t>
-            </a:r>
             <a:r>
               <a:rPr lang="ru-RU" sz="1000" spc="20" dirty="0">
                 <a:latin typeface="Arial" panose="020B0604020202020204" pitchFamily="34" charset="0"/>
                 <a:ea typeface="Roboto" panose="02000000000000000000" pitchFamily="2" charset="0"/>
                 <a:cs typeface="Arial" panose="020B0604020202020204" pitchFamily="34" charset="0"/>
               </a:rPr>
-              <a:t>решение кейса</a:t>
+              <a:t>в решение кейса</a:t>
             </a:r>
             <a:endParaRPr lang="ru-RU" sz="1000" dirty="0">
               <a:latin typeface="Arial" panose="020B0604020202020204" pitchFamily="34" charset="0"/>
@@ -6251,7 +6944,23 @@
                 <a:ea typeface="Roboto" panose="02000000000000000000" pitchFamily="2" charset="0"/>
                 <a:cs typeface="Arial" panose="020B0604020202020204" pitchFamily="34" charset="0"/>
               </a:rPr>
-              <a:t>Здесь рекомендуется указать название команды, а также название организации</a:t>
+              <a:t>Название команды</a:t>
+            </a:r>
+            <a:r>
+              <a:rPr lang="en-US" altLang="ru-RU" sz="1600" spc="20" dirty="0">
+                <a:latin typeface="Arial" panose="020B0604020202020204" pitchFamily="34" charset="0"/>
+                <a:ea typeface="Roboto" panose="02000000000000000000" pitchFamily="2" charset="0"/>
+                <a:cs typeface="Arial" panose="020B0604020202020204" pitchFamily="34" charset="0"/>
+              </a:rPr>
+              <a:t>:</a:t>
+            </a:r>
+            <a:r>
+              <a:rPr lang="ru-RU" altLang="ru-RU" sz="1600" spc="20" dirty="0">
+                <a:latin typeface="Arial" panose="020B0604020202020204" pitchFamily="34" charset="0"/>
+                <a:ea typeface="Roboto" panose="02000000000000000000" pitchFamily="2" charset="0"/>
+                <a:cs typeface="Arial" panose="020B0604020202020204" pitchFamily="34" charset="0"/>
+              </a:rPr>
+              <a:t> Ом уполномочен говорить</a:t>
             </a:r>
           </a:p>
         </p:txBody>
@@ -6300,7 +7009,7 @@
         <p:spPr>
           <a:xfrm>
             <a:off x="2496286" y="3510142"/>
-            <a:ext cx="1565813" cy="523220"/>
+            <a:ext cx="2218877" cy="523220"/>
           </a:xfrm>
           <a:prstGeom prst="rect">
             <a:avLst/>
@@ -6321,7 +7030,7 @@
                 <a:ea typeface="Roboto" panose="02000000000000000000" pitchFamily="2" charset="0"/>
                 <a:cs typeface="Arial" panose="020B0604020202020204" pitchFamily="34" charset="0"/>
               </a:rPr>
-              <a:t>Имя Фамилия</a:t>
+              <a:t>Александр Белоусов</a:t>
             </a:r>
           </a:p>
           <a:p>
@@ -6376,28 +7085,15 @@
               </a:rPr>
               <a:t>Коротко об участнике: какие задачи решал, опыт участия в аналогичных проектах, вклад </a:t>
             </a:r>
-            <a:endParaRPr lang="ru-RU" sz="1000" spc="20" dirty="0" smtClean="0">
-              <a:latin typeface="Arial" panose="020B0604020202020204" pitchFamily="34" charset="0"/>
-              <a:ea typeface="Roboto" panose="02000000000000000000" pitchFamily="2" charset="0"/>
-              <a:cs typeface="Arial" panose="020B0604020202020204" pitchFamily="34" charset="0"/>
-            </a:endParaRPr>
           </a:p>
           <a:p>
-            <a:r>
-              <a:rPr lang="ru-RU" sz="1000" spc="20" dirty="0" smtClean="0">
-                <a:latin typeface="Arial" panose="020B0604020202020204" pitchFamily="34" charset="0"/>
-                <a:ea typeface="Roboto" panose="02000000000000000000" pitchFamily="2" charset="0"/>
-                <a:cs typeface="Arial" panose="020B0604020202020204" pitchFamily="34" charset="0"/>
-              </a:rPr>
-              <a:t>в </a:t>
-            </a:r>
             <a:r>
               <a:rPr lang="ru-RU" sz="1000" spc="20" dirty="0">
                 <a:latin typeface="Arial" panose="020B0604020202020204" pitchFamily="34" charset="0"/>
                 <a:ea typeface="Roboto" panose="02000000000000000000" pitchFamily="2" charset="0"/>
                 <a:cs typeface="Arial" panose="020B0604020202020204" pitchFamily="34" charset="0"/>
               </a:rPr>
-              <a:t>решение кейса</a:t>
+              <a:t>в решение кейса</a:t>
             </a:r>
             <a:endParaRPr lang="ru-RU" sz="1000" dirty="0">
               <a:latin typeface="Arial" panose="020B0604020202020204" pitchFamily="34" charset="0"/>
@@ -6451,7 +7147,7 @@
         <p:spPr>
           <a:xfrm>
             <a:off x="4648652" y="3510142"/>
-            <a:ext cx="1565813" cy="523220"/>
+            <a:ext cx="1689437" cy="523220"/>
           </a:xfrm>
           <a:prstGeom prst="rect">
             <a:avLst/>
@@ -6472,7 +7168,7 @@
                 <a:ea typeface="Roboto" panose="02000000000000000000" pitchFamily="2" charset="0"/>
                 <a:cs typeface="Arial" panose="020B0604020202020204" pitchFamily="34" charset="0"/>
               </a:rPr>
-              <a:t>Имя Фамилия</a:t>
+              <a:t>Курышкин Глеб</a:t>
             </a:r>
           </a:p>
           <a:p>
@@ -6527,28 +7223,15 @@
               </a:rPr>
               <a:t>Коротко об участнике: какие задачи решал, опыт участия в аналогичных проектах, вклад </a:t>
             </a:r>
-            <a:endParaRPr lang="ru-RU" sz="1000" spc="20" dirty="0" smtClean="0">
-              <a:latin typeface="Arial" panose="020B0604020202020204" pitchFamily="34" charset="0"/>
-              <a:ea typeface="Roboto" panose="02000000000000000000" pitchFamily="2" charset="0"/>
-              <a:cs typeface="Arial" panose="020B0604020202020204" pitchFamily="34" charset="0"/>
-            </a:endParaRPr>
           </a:p>
           <a:p>
-            <a:r>
-              <a:rPr lang="ru-RU" sz="1000" spc="20" dirty="0" smtClean="0">
-                <a:latin typeface="Arial" panose="020B0604020202020204" pitchFamily="34" charset="0"/>
-                <a:ea typeface="Roboto" panose="02000000000000000000" pitchFamily="2" charset="0"/>
-                <a:cs typeface="Arial" panose="020B0604020202020204" pitchFamily="34" charset="0"/>
-              </a:rPr>
-              <a:t>в </a:t>
-            </a:r>
             <a:r>
               <a:rPr lang="ru-RU" sz="1000" spc="20" dirty="0">
                 <a:latin typeface="Arial" panose="020B0604020202020204" pitchFamily="34" charset="0"/>
                 <a:ea typeface="Roboto" panose="02000000000000000000" pitchFamily="2" charset="0"/>
                 <a:cs typeface="Arial" panose="020B0604020202020204" pitchFamily="34" charset="0"/>
               </a:rPr>
-              <a:t>решение кейса</a:t>
+              <a:t>в решение кейса</a:t>
             </a:r>
             <a:endParaRPr lang="ru-RU" sz="1000" dirty="0">
               <a:latin typeface="Arial" panose="020B0604020202020204" pitchFamily="34" charset="0"/>
@@ -6602,7 +7285,7 @@
         <p:spPr>
           <a:xfrm>
             <a:off x="6801019" y="3510142"/>
-            <a:ext cx="1565813" cy="523220"/>
+            <a:ext cx="1862754" cy="523220"/>
           </a:xfrm>
           <a:prstGeom prst="rect">
             <a:avLst/>
@@ -6623,7 +7306,7 @@
                 <a:ea typeface="Roboto" panose="02000000000000000000" pitchFamily="2" charset="0"/>
                 <a:cs typeface="Arial" panose="020B0604020202020204" pitchFamily="34" charset="0"/>
               </a:rPr>
-              <a:t>Имя Фамилия</a:t>
+              <a:t>Демешко Кирилл</a:t>
             </a:r>
           </a:p>
           <a:p>
@@ -6678,28 +7361,15 @@
               </a:rPr>
               <a:t>Коротко об участнике: какие задачи решал, опыт участия в аналогичных проектах, вклад </a:t>
             </a:r>
-            <a:endParaRPr lang="ru-RU" sz="1000" spc="20" dirty="0" smtClean="0">
-              <a:latin typeface="Arial" panose="020B0604020202020204" pitchFamily="34" charset="0"/>
-              <a:ea typeface="Roboto" panose="02000000000000000000" pitchFamily="2" charset="0"/>
-              <a:cs typeface="Arial" panose="020B0604020202020204" pitchFamily="34" charset="0"/>
-            </a:endParaRPr>
           </a:p>
           <a:p>
-            <a:r>
-              <a:rPr lang="ru-RU" sz="1000" spc="20" dirty="0" smtClean="0">
-                <a:latin typeface="Arial" panose="020B0604020202020204" pitchFamily="34" charset="0"/>
-                <a:ea typeface="Roboto" panose="02000000000000000000" pitchFamily="2" charset="0"/>
-                <a:cs typeface="Arial" panose="020B0604020202020204" pitchFamily="34" charset="0"/>
-              </a:rPr>
-              <a:t>в </a:t>
-            </a:r>
             <a:r>
               <a:rPr lang="ru-RU" sz="1000" spc="20" dirty="0">
                 <a:latin typeface="Arial" panose="020B0604020202020204" pitchFamily="34" charset="0"/>
                 <a:ea typeface="Roboto" panose="02000000000000000000" pitchFamily="2" charset="0"/>
                 <a:cs typeface="Arial" panose="020B0604020202020204" pitchFamily="34" charset="0"/>
               </a:rPr>
-              <a:t>решение кейса</a:t>
+              <a:t>в решение кейса</a:t>
             </a:r>
             <a:endParaRPr lang="ru-RU" sz="1000" dirty="0">
               <a:latin typeface="Arial" panose="020B0604020202020204" pitchFamily="34" charset="0"/>
@@ -7027,7 +7697,7 @@
           <a:p>
             <a:pPr algn="l" eaLnBrk="1" hangingPunct="1"/>
             <a:r>
-              <a:rPr lang="ru-RU" altLang="ru-RU" sz="2400" b="1" dirty="0" smtClean="0">
+              <a:rPr lang="ru-RU" altLang="ru-RU" sz="2400" b="1" dirty="0">
                 <a:solidFill>
                   <a:srgbClr val="2E56A8"/>
                 </a:solidFill>
@@ -7037,14 +7707,6 @@
               </a:rPr>
               <a:t>Анализ</a:t>
             </a:r>
-            <a:endParaRPr lang="ru-RU" altLang="ru-RU" sz="2400" b="1" dirty="0">
-              <a:solidFill>
-                <a:srgbClr val="2E56A8"/>
-              </a:solidFill>
-              <a:latin typeface="Arial" panose="020B0604020202020204" pitchFamily="34" charset="0"/>
-              <a:ea typeface="Roboto" panose="02000000000000000000" pitchFamily="2" charset="0"/>
-              <a:cs typeface="Arial" panose="020B0604020202020204" pitchFamily="34" charset="0"/>
-            </a:endParaRPr>
           </a:p>
         </p:txBody>
       </p:sp>
@@ -7940,7 +8602,7 @@
           <a:p>
             <a:pPr algn="l" eaLnBrk="1" hangingPunct="1"/>
             <a:r>
-              <a:rPr lang="ru-RU" altLang="ru-RU" sz="2400" b="1" dirty="0" err="1" smtClean="0">
+              <a:rPr lang="ru-RU" altLang="ru-RU" sz="2400" b="1" dirty="0">
                 <a:solidFill>
                   <a:srgbClr val="2E56A8"/>
                 </a:solidFill>
@@ -7948,16 +8610,8 @@
                 <a:ea typeface="Roboto" panose="02000000000000000000" pitchFamily="2" charset="0"/>
                 <a:cs typeface="Arial" panose="020B0604020202020204" pitchFamily="34" charset="0"/>
               </a:rPr>
-              <a:t>Аализ</a:t>
+              <a:t>Анализ</a:t>
             </a:r>
-            <a:endParaRPr lang="ru-RU" altLang="ru-RU" sz="2400" b="1" dirty="0">
-              <a:solidFill>
-                <a:srgbClr val="2E56A8"/>
-              </a:solidFill>
-              <a:latin typeface="Arial" panose="020B0604020202020204" pitchFamily="34" charset="0"/>
-              <a:ea typeface="Roboto" panose="02000000000000000000" pitchFamily="2" charset="0"/>
-              <a:cs typeface="Arial" panose="020B0604020202020204" pitchFamily="34" charset="0"/>
-            </a:endParaRPr>
           </a:p>
         </p:txBody>
       </p:sp>
@@ -8547,32 +9201,18 @@
               </a:rPr>
               <a:t>Анализ факторов, влияющих </a:t>
             </a:r>
-            <a:r>
-              <a:rPr lang="ru-RU" altLang="ru-RU" sz="1800" dirty="0" smtClean="0">
-                <a:latin typeface="Arial" panose="020B0604020202020204" pitchFamily="34" charset="0"/>
-                <a:cs typeface="Arial" panose="020B0604020202020204" pitchFamily="34" charset="0"/>
-              </a:rPr>
-              <a:t/>
-            </a:r>
             <a:br>
-              <a:rPr lang="ru-RU" altLang="ru-RU" sz="1800" dirty="0" smtClean="0">
+              <a:rPr lang="ru-RU" altLang="ru-RU" sz="1800" dirty="0">
                 <a:latin typeface="Arial" panose="020B0604020202020204" pitchFamily="34" charset="0"/>
                 <a:cs typeface="Arial" panose="020B0604020202020204" pitchFamily="34" charset="0"/>
               </a:rPr>
             </a:br>
             <a:r>
-              <a:rPr lang="ru-RU" altLang="ru-RU" sz="1800" dirty="0" smtClean="0">
-                <a:latin typeface="Arial" panose="020B0604020202020204" pitchFamily="34" charset="0"/>
-                <a:cs typeface="Arial" panose="020B0604020202020204" pitchFamily="34" charset="0"/>
-              </a:rPr>
-              <a:t>на </a:t>
-            </a:r>
-            <a:r>
               <a:rPr lang="ru-RU" altLang="ru-RU" sz="1800" dirty="0">
                 <a:latin typeface="Arial" panose="020B0604020202020204" pitchFamily="34" charset="0"/>
                 <a:cs typeface="Arial" panose="020B0604020202020204" pitchFamily="34" charset="0"/>
               </a:rPr>
-              <a:t>выбор потенциального решения.</a:t>
+              <a:t>на выбор потенциального решения.</a:t>
             </a:r>
           </a:p>
         </p:txBody>
@@ -8815,7 +9455,7 @@
           <a:p>
             <a:pPr algn="l" eaLnBrk="1" hangingPunct="1"/>
             <a:r>
-              <a:rPr lang="ru-RU" altLang="ru-RU" sz="2400" b="1" dirty="0" smtClean="0">
+              <a:rPr lang="ru-RU" altLang="ru-RU" sz="2400" b="1" dirty="0">
                 <a:solidFill>
                   <a:srgbClr val="2E56A8"/>
                 </a:solidFill>
@@ -8825,14 +9465,6 @@
               </a:rPr>
               <a:t>Решение</a:t>
             </a:r>
-            <a:endParaRPr lang="ru-RU" altLang="ru-RU" sz="2400" b="1" dirty="0">
-              <a:solidFill>
-                <a:srgbClr val="2E56A8"/>
-              </a:solidFill>
-              <a:latin typeface="Arial" panose="020B0604020202020204" pitchFamily="34" charset="0"/>
-              <a:ea typeface="Roboto" panose="02000000000000000000" pitchFamily="2" charset="0"/>
-              <a:cs typeface="Arial" panose="020B0604020202020204" pitchFamily="34" charset="0"/>
-            </a:endParaRPr>
           </a:p>
         </p:txBody>
       </p:sp>
@@ -9419,32 +10051,18 @@
               </a:rPr>
               <a:t>Предложения в проект </a:t>
             </a:r>
-            <a:r>
-              <a:rPr lang="ru-RU" altLang="ru-RU" sz="1800" dirty="0" smtClean="0">
-                <a:latin typeface="Arial" panose="020B0604020202020204" pitchFamily="34" charset="0"/>
-                <a:cs typeface="Arial" panose="020B0604020202020204" pitchFamily="34" charset="0"/>
-              </a:rPr>
-              <a:t/>
-            </a:r>
             <a:br>
-              <a:rPr lang="ru-RU" altLang="ru-RU" sz="1800" dirty="0" smtClean="0">
+              <a:rPr lang="ru-RU" altLang="ru-RU" sz="1800" dirty="0">
                 <a:latin typeface="Arial" panose="020B0604020202020204" pitchFamily="34" charset="0"/>
                 <a:cs typeface="Arial" panose="020B0604020202020204" pitchFamily="34" charset="0"/>
               </a:rPr>
             </a:br>
             <a:r>
-              <a:rPr lang="ru-RU" altLang="ru-RU" sz="1800" dirty="0" smtClean="0">
-                <a:latin typeface="Arial" panose="020B0604020202020204" pitchFamily="34" charset="0"/>
-                <a:cs typeface="Arial" panose="020B0604020202020204" pitchFamily="34" charset="0"/>
-              </a:rPr>
-              <a:t>по </a:t>
-            </a:r>
-            <a:r>
               <a:rPr lang="ru-RU" altLang="ru-RU" sz="1800" dirty="0">
                 <a:latin typeface="Arial" panose="020B0604020202020204" pitchFamily="34" charset="0"/>
                 <a:cs typeface="Arial" panose="020B0604020202020204" pitchFamily="34" charset="0"/>
               </a:rPr>
-              <a:t>внедрению/использованию новой технологии.</a:t>
+              <a:t>по внедрению/использованию новой технологии.</a:t>
             </a:r>
           </a:p>
         </p:txBody>
@@ -9687,7 +10305,7 @@
           <a:p>
             <a:pPr algn="l" eaLnBrk="1" hangingPunct="1"/>
             <a:r>
-              <a:rPr lang="ru-RU" altLang="ru-RU" sz="2400" b="1" dirty="0" smtClean="0">
+              <a:rPr lang="ru-RU" altLang="ru-RU" sz="2400" b="1" dirty="0">
                 <a:solidFill>
                   <a:srgbClr val="2E56A8"/>
                 </a:solidFill>
@@ -9697,14 +10315,6 @@
               </a:rPr>
               <a:t>Решение</a:t>
             </a:r>
-            <a:endParaRPr lang="ru-RU" altLang="ru-RU" sz="2400" b="1" dirty="0">
-              <a:solidFill>
-                <a:srgbClr val="2E56A8"/>
-              </a:solidFill>
-              <a:latin typeface="Arial" panose="020B0604020202020204" pitchFamily="34" charset="0"/>
-              <a:ea typeface="Roboto" panose="02000000000000000000" pitchFamily="2" charset="0"/>
-              <a:cs typeface="Arial" panose="020B0604020202020204" pitchFamily="34" charset="0"/>
-            </a:endParaRPr>
           </a:p>
         </p:txBody>
       </p:sp>
@@ -10549,7 +11159,7 @@
           <a:p>
             <a:pPr algn="l" eaLnBrk="1" hangingPunct="1"/>
             <a:r>
-              <a:rPr lang="ru-RU" altLang="ru-RU" sz="2400" b="1" dirty="0" smtClean="0">
+              <a:rPr lang="ru-RU" altLang="ru-RU" sz="2400" b="1" dirty="0">
                 <a:solidFill>
                   <a:srgbClr val="2E56A8"/>
                 </a:solidFill>
@@ -10559,14 +11169,6 @@
               </a:rPr>
               <a:t>Решение</a:t>
             </a:r>
-            <a:endParaRPr lang="ru-RU" altLang="ru-RU" sz="2400" b="1" dirty="0">
-              <a:solidFill>
-                <a:srgbClr val="2E56A8"/>
-              </a:solidFill>
-              <a:latin typeface="Arial" panose="020B0604020202020204" pitchFamily="34" charset="0"/>
-              <a:ea typeface="Roboto" panose="02000000000000000000" pitchFamily="2" charset="0"/>
-              <a:cs typeface="Arial" panose="020B0604020202020204" pitchFamily="34" charset="0"/>
-            </a:endParaRPr>
           </a:p>
         </p:txBody>
       </p:sp>
@@ -11632,7 +12234,7 @@
           <a:p>
             <a:pPr algn="l" eaLnBrk="1" hangingPunct="1"/>
             <a:r>
-              <a:rPr lang="ru-RU" altLang="ru-RU" sz="2400" b="1" dirty="0" smtClean="0">
+              <a:rPr lang="ru-RU" altLang="ru-RU" sz="2400" b="1" dirty="0">
                 <a:solidFill>
                   <a:srgbClr val="2E56A8"/>
                 </a:solidFill>
@@ -11642,14 +12244,6 @@
               </a:rPr>
               <a:t>Решение</a:t>
             </a:r>
-            <a:endParaRPr lang="ru-RU" altLang="ru-RU" sz="2400" b="1" dirty="0">
-              <a:solidFill>
-                <a:srgbClr val="2E56A8"/>
-              </a:solidFill>
-              <a:latin typeface="Arial" panose="020B0604020202020204" pitchFamily="34" charset="0"/>
-              <a:ea typeface="Roboto" panose="02000000000000000000" pitchFamily="2" charset="0"/>
-              <a:cs typeface="Arial" panose="020B0604020202020204" pitchFamily="34" charset="0"/>
-            </a:endParaRPr>
           </a:p>
         </p:txBody>
       </p:sp>
@@ -11996,21 +12590,7 @@
                 <a:latin typeface="Arial" panose="020B0604020202020204" pitchFamily="34" charset="0"/>
                 <a:cs typeface="Arial" panose="020B0604020202020204" pitchFamily="34" charset="0"/>
               </a:rPr>
-              <a:t>Обоснование, расчёты, характеристики </a:t>
-            </a:r>
-            <a:r>
-              <a:rPr lang="ru-RU" altLang="ru-RU" sz="1800" dirty="0" smtClean="0">
-                <a:latin typeface="Arial" panose="020B0604020202020204" pitchFamily="34" charset="0"/>
-                <a:cs typeface="Arial" panose="020B0604020202020204" pitchFamily="34" charset="0"/>
-              </a:rPr>
-              <a:t>и </a:t>
-            </a:r>
-            <a:r>
-              <a:rPr lang="ru-RU" altLang="ru-RU" sz="1800" dirty="0">
-                <a:latin typeface="Arial" panose="020B0604020202020204" pitchFamily="34" charset="0"/>
-                <a:cs typeface="Arial" panose="020B0604020202020204" pitchFamily="34" charset="0"/>
-              </a:rPr>
-              <a:t>показатели предлагаемого варианта.</a:t>
+              <a:t>Обоснование, расчёты, характеристики и показатели предлагаемого варианта.</a:t>
             </a:r>
           </a:p>
           <a:p>
@@ -12868,32 +13448,18 @@
               </a:rPr>
               <a:t>Оценка предполагаемого эффекта </a:t>
             </a:r>
-            <a:r>
-              <a:rPr lang="ru-RU" altLang="ru-RU" sz="1800" dirty="0" smtClean="0">
-                <a:latin typeface="Arial" panose="020B0604020202020204" pitchFamily="34" charset="0"/>
-                <a:cs typeface="Arial" panose="020B0604020202020204" pitchFamily="34" charset="0"/>
-              </a:rPr>
-              <a:t/>
-            </a:r>
             <a:br>
-              <a:rPr lang="ru-RU" altLang="ru-RU" sz="1800" dirty="0" smtClean="0">
+              <a:rPr lang="ru-RU" altLang="ru-RU" sz="1800" dirty="0">
                 <a:latin typeface="Arial" panose="020B0604020202020204" pitchFamily="34" charset="0"/>
                 <a:cs typeface="Arial" panose="020B0604020202020204" pitchFamily="34" charset="0"/>
               </a:rPr>
             </a:br>
             <a:r>
-              <a:rPr lang="ru-RU" altLang="ru-RU" sz="1800" dirty="0" smtClean="0">
-                <a:latin typeface="Arial" panose="020B0604020202020204" pitchFamily="34" charset="0"/>
-                <a:cs typeface="Arial" panose="020B0604020202020204" pitchFamily="34" charset="0"/>
-              </a:rPr>
-              <a:t>с </a:t>
-            </a:r>
-            <a:r>
               <a:rPr lang="ru-RU" altLang="ru-RU" sz="1800" dirty="0">
                 <a:latin typeface="Arial" panose="020B0604020202020204" pitchFamily="34" charset="0"/>
                 <a:cs typeface="Arial" panose="020B0604020202020204" pitchFamily="34" charset="0"/>
               </a:rPr>
-              <a:t>учетом применения предложенного решения.</a:t>
+              <a:t>с учетом применения предложенного решения.</a:t>
             </a:r>
           </a:p>
         </p:txBody>
